--- a/PowerPoints/RECYCL_IT_final_pitch.pptx
+++ b/PowerPoints/RECYCL_IT_final_pitch.pptx
@@ -5,19 +5,19 @@
     <p:sldMasterId id="2147483648" r:id="rId1"/>
   </p:sldMasterIdLst>
   <p:notesMasterIdLst>
-    <p:notesMasterId r:id="rId11"/>
+    <p:notesMasterId r:id="rId12"/>
   </p:notesMasterIdLst>
   <p:sldIdLst>
     <p:sldId id="256" r:id="rId2"/>
     <p:sldId id="257" r:id="rId3"/>
     <p:sldId id="258" r:id="rId4"/>
-    <p:sldId id="266" r:id="rId16"/>
+    <p:sldId id="266" r:id="rId5"/>
     <p:sldId id="261" r:id="rId6"/>
     <p:sldId id="263" r:id="rId7"/>
-    <p:sldId id="259" r:id="rId5"/>
+    <p:sldId id="259" r:id="rId8"/>
     <p:sldId id="265" r:id="rId9"/>
     <p:sldId id="264" r:id="rId10"/>
-    <p:sldId id="262" r:id="rId8"/>
+    <p:sldId id="262" r:id="rId11"/>
   </p:sldIdLst>
   <p:sldSz cx="12192000" cy="6858000"/>
   <p:notesSz cx="6858000" cy="12192000"/>
@@ -121,20 +121,21 @@
             <p14:sldId id="256"/>
             <p14:sldId id="257"/>
             <p14:sldId id="258"/>
-          </p14:sldIdLst>
-        </p14:section>
-        <p14:section name="Business and money" id="{D704BC05-1E27-749D-CEA4-663CFF693BAC}">
-          <p14:sldIdLst>
-            <p14:sldId id="259"/>
+            <p14:sldId id="266"/>
           </p14:sldIdLst>
         </p14:section>
         <p14:section name="Why us, risks, next steps" id="{0319B97D-4E74-1E44-9A5B-804520175331}">
           <p14:sldIdLst>
             <p14:sldId id="261"/>
             <p14:sldId id="263"/>
-            <p14:sldId id="262"/>
+          </p14:sldIdLst>
+        </p14:section>
+        <p14:section name="Business and money" id="{D704BC05-1E27-749D-CEA4-663CFF693BAC}">
+          <p14:sldIdLst>
+            <p14:sldId id="259"/>
             <p14:sldId id="265"/>
             <p14:sldId id="264"/>
+            <p14:sldId id="262"/>
           </p14:sldIdLst>
         </p14:section>
       </p14:sectionLst>
@@ -358,7 +359,7 @@
 </file>
 
 <file path=ppt/notesSlides/notesSlide10.xml><?xml version="1.0" encoding="utf-8"?>
-<p:notes xmlns:a="http://schemas.openxmlformats.org/drawingml/2006/main" xmlns:p="http://schemas.openxmlformats.org/presentationml/2006/main" xmlns:r="http://schemas.openxmlformats.org/officeDocument/2006/relationships">
+<p:notes xmlns:a="http://schemas.openxmlformats.org/drawingml/2006/main" xmlns:r="http://schemas.openxmlformats.org/officeDocument/2006/relationships" xmlns:p="http://schemas.openxmlformats.org/presentationml/2006/main">
   <p:cSld>
     <p:spTree>
       <p:nvGrpSpPr>
@@ -402,7 +403,37 @@
           <a:lstStyle/>
           <a:p>
             <a:r>
-              <a:t>[~10 s] We are three: Thorben builds the app, Pipatsakorn designs it, Gabriel does the research. We used AI to go from a paper idea to a working app in 24 hours.</a:t>
+              <a:t>BACKUP — do not present. Open this slide during Q&amp;A when the jury asks about cheating, funding, privacy or motivation.</a:t>
+            </a:r>
+          </a:p>
+          <a:p>
+            <a:r>
+              <a:t>Other likely questions:</a:t>
+            </a:r>
+          </a:p>
+          <a:p>
+            <a:r>
+              <a:t>• Why would a town pay? Less recyclable waste in the trash bag means less incineration and a better recycling rate; we also give them anonymised data on where people recycle.</a:t>
+            </a:r>
+          </a:p>
+          <a:p>
+            <a:r>
+              <a:t>• Who is your first paying customer? The Gemeinde Risch — we pitch them first because we can test locally.</a:t>
+            </a:r>
+          </a:p>
+          <a:p>
+            <a:r>
+              <a:t>• How is this different from PET-Recycling's own campaigns? Those are one-off contests; we are a year-round habit.</a:t>
+            </a:r>
+          </a:p>
+          <a:p>
+            <a:r>
+              <a:t>• Minors' data? No ads, no data selling, only anonymised totals for partners, parental consent under 16.</a:t>
+            </a:r>
+          </a:p>
+          <a:p>
+            <a:r>
+              <a:t>• What if sponsors leave? Rewards scale with sponsors; points can also unlock community rewards (e.g. tree planted).</a:t>
             </a:r>
           </a:p>
         </p:txBody>
@@ -424,13 +455,18 @@
           <a:p>
             <a:fld id="{F7021451-1387-4CA6-816F-3879F97B5CBC}" type="slidenum">
               <a:rPr lang="en-US"/>
-              <a:t>2</a:t>
+              <a:t>10</a:t>
             </a:fld>
             <a:endParaRPr lang="en-US"/>
           </a:p>
         </p:txBody>
       </p:sp>
     </p:spTree>
+    <p:extLst>
+      <p:ext uri="{BB962C8B-B14F-4D97-AF65-F5344CB8AC3E}">
+        <p14:creationId xmlns:p14="http://schemas.microsoft.com/office/powerpoint/2010/main" val="1024086991"/>
+      </p:ext>
+    </p:extLst>
   </p:cSld>
   <p:clrMapOvr>
     <a:masterClrMapping/>
@@ -655,7 +691,7 @@
           <a:lstStyle/>
           <a:p>
             <a:r>
-              <a:t>[~20 s] In 24 hours we built a working mobile web app — the loop you just saw. We also asked [Y] people here at ZentralHack: [X] said rewards would get them to recycle more. Next three months: pitch to the Gemeinde Risch, put QR stickers on 10 collection points, reach 100 pilot users. In six months: five local sponsors, measure who keeps coming back, and start a second town. What we need now: a pilot town, local reward sponsors, and your feedback.</a:t>
+              <a:t>[~35 s] Who pays? Not the users — the app is always free. Our first customer is the Gemeinde Risch: every bottle that leaves the trash bag means less incineration and a better recycling rate. We charge 40 Rappen per resident a year, about CHF 4,400 for Risch. Local shops and cafés pay CHF 30 a month for visibility and fund the rewards themselves, so rewards cost us nothing. Year-1 costs are about CHF 4,000: hosting and app-store fees ~1,500, QR stickers ~500, flyers and school events ~1,000, buffer ~1,000. With Risch and five shops we earn about CHF 6,200, so the pilot breaks even in year 1. Six towns like Risch bring about CHF 26,000 a year — enough for a part-time developer.</a:t>
             </a:r>
           </a:p>
         </p:txBody>
@@ -684,11 +720,6 @@
         </p:txBody>
       </p:sp>
     </p:spTree>
-    <p:extLst>
-      <p:ext uri="{BB962C8B-B14F-4D97-AF65-F5344CB8AC3E}">
-        <p14:creationId xmlns:p14="http://schemas.microsoft.com/office/powerpoint/2010/main" val="1024086991"/>
-      </p:ext>
-    </p:extLst>
   </p:cSld>
   <p:clrMapOvr>
     <a:masterClrMapping/>
@@ -913,37 +944,7 @@
           <a:lstStyle/>
           <a:p>
             <a:r>
-              <a:t>BACKUP — do not present. Open this slide during Q&amp;A when the jury asks about cheating, funding, privacy or motivation.</a:t>
-            </a:r>
-          </a:p>
-          <a:p>
-            <a:r>
-              <a:t>Other likely questions:</a:t>
-            </a:r>
-          </a:p>
-          <a:p>
-            <a:r>
-              <a:t>• Why would a town pay? Less recyclable waste in the trash bag means less incineration and a better recycling rate; we also give them anonymised data on where people recycle.</a:t>
-            </a:r>
-          </a:p>
-          <a:p>
-            <a:r>
-              <a:t>• Who is your first paying customer? The Gemeinde Risch — we pitch them first because we can test locally.</a:t>
-            </a:r>
-          </a:p>
-          <a:p>
-            <a:r>
-              <a:t>• How is this different from PET-Recycling's own campaigns? Those are one-off contests; we are a year-round habit.</a:t>
-            </a:r>
-          </a:p>
-          <a:p>
-            <a:r>
-              <a:t>• Minors' data? No ads, no data selling, only anonymised totals for partners, parental consent under 16.</a:t>
-            </a:r>
-          </a:p>
-          <a:p>
-            <a:r>
-              <a:t>• What if sponsors leave? Rewards scale with sponsors; points can also unlock community rewards (e.g. tree planted).</a:t>
+              <a:t>[~20 s] In 24 hours we built a working mobile web app — the loop you just saw. We also asked [Y] people here at ZentralHack: [X] said rewards would get them to recycle more. Next three months: pitch to the Gemeinde Risch, put QR stickers on 10 collection points, reach 100 pilot users. In six months: five local sponsors, measure who keeps coming back, and start a second town. What we need now: a pilot town, local reward sponsors, and your feedback.</a:t>
             </a:r>
           </a:p>
         </p:txBody>
@@ -1029,7 +1030,7 @@
           <a:lstStyle/>
           <a:p>
             <a:r>
-              <a:t>[~10 s] Our vision: make sustainability rewarding and make recycling a habit. One action. One reward. A better community. Help us start in Rotkreuz. Thank you!</a:t>
+              <a:t>[~10 s] We are three: Thorben builds the app, Pipatsakorn designs it, Gabriel does the research. We used AI to go from a paper idea to a working app in 24 hours.</a:t>
             </a:r>
           </a:p>
         </p:txBody>
@@ -1051,18 +1052,13 @@
           <a:p>
             <a:fld id="{F7021451-1387-4CA6-816F-3879F97B5CBC}" type="slidenum">
               <a:rPr lang="en-US"/>
-              <a:t>9</a:t>
+              <a:t>8</a:t>
             </a:fld>
             <a:endParaRPr lang="en-US"/>
           </a:p>
         </p:txBody>
       </p:sp>
     </p:spTree>
-    <p:extLst>
-      <p:ext uri="{BB962C8B-B14F-4D97-AF65-F5344CB8AC3E}">
-        <p14:creationId xmlns:p14="http://schemas.microsoft.com/office/powerpoint/2010/main" val="1024086991"/>
-      </p:ext>
-    </p:extLst>
   </p:cSld>
   <p:clrMapOvr>
     <a:masterClrMapping/>
@@ -1071,7 +1067,7 @@
 </file>
 
 <file path=ppt/notesSlides/notesSlide9.xml><?xml version="1.0" encoding="utf-8"?>
-<p:notes xmlns:a="http://schemas.openxmlformats.org/drawingml/2006/main" xmlns:p="http://schemas.openxmlformats.org/presentationml/2006/main" xmlns:r="http://schemas.openxmlformats.org/officeDocument/2006/relationships">
+<p:notes xmlns:a="http://schemas.openxmlformats.org/drawingml/2006/main" xmlns:r="http://schemas.openxmlformats.org/officeDocument/2006/relationships" xmlns:p="http://schemas.openxmlformats.org/presentationml/2006/main">
   <p:cSld>
     <p:spTree>
       <p:nvGrpSpPr>
@@ -1115,7 +1111,7 @@
           <a:lstStyle/>
           <a:p>
             <a:r>
-              <a:t>[~35 s] Who pays? Not the users — the app is always free. Our first customer is the Gemeinde Risch: every bottle that leaves the trash bag means less incineration and a better recycling rate. We charge 40 Rappen per resident a year, about CHF 4,400 for Risch. Local shops and cafés pay CHF 30 a month for visibility and fund the rewards themselves, so rewards cost us nothing. Year-1 costs are about CHF 4,000: hosting and app-store fees ~1,500, QR stickers ~500, flyers and school events ~1,000, buffer ~1,000. With Risch and five shops we earn about CHF 6,200, so the pilot breaks even in year 1. Six towns like Risch bring about CHF 26,000 a year — enough for a part-time developer.</a:t>
+              <a:t>[~10 s] Our vision: make sustainability rewarding and make recycling a habit. One action. One reward. A better community. Help us start in Rotkreuz. Thank you!</a:t>
             </a:r>
           </a:p>
         </p:txBody>
@@ -1137,13 +1133,18 @@
           <a:p>
             <a:fld id="{F7021451-1387-4CA6-816F-3879F97B5CBC}" type="slidenum">
               <a:rPr lang="en-US"/>
-              <a:t>2</a:t>
+              <a:t>9</a:t>
             </a:fld>
             <a:endParaRPr lang="en-US"/>
           </a:p>
         </p:txBody>
       </p:sp>
     </p:spTree>
+    <p:extLst>
+      <p:ext uri="{BB962C8B-B14F-4D97-AF65-F5344CB8AC3E}">
+        <p14:creationId xmlns:p14="http://schemas.microsoft.com/office/powerpoint/2010/main" val="1024086991"/>
+      </p:ext>
+    </p:extLst>
   </p:cSld>
   <p:clrMapOvr>
     <a:masterClrMapping/>
@@ -1303,7 +1304,7 @@
           </a:prstGeom>
           <a:extLst>
             <a:ext uri="{C572A759-6A51-4108-AA02-DFA0A04FC94B}">
-              <ma14:wrappingTextBoxFlag xmlns:ma14="http://schemas.microsoft.com/office/mac/drawingml/2011/main" xmlns="" val="0"/>
+              <ma14:wrappingTextBoxFlag xmlns="" xmlns:ma14="http://schemas.microsoft.com/office/mac/drawingml/2011/main" val="0"/>
             </a:ext>
           </a:extLst>
         </p:spPr>
@@ -1417,7 +1418,7 @@
           </a:prstGeom>
           <a:extLst>
             <a:ext uri="{C572A759-6A51-4108-AA02-DFA0A04FC94B}">
-              <ma14:wrappingTextBoxFlag xmlns:ma14="http://schemas.microsoft.com/office/mac/drawingml/2011/main" xmlns="" val="0"/>
+              <ma14:wrappingTextBoxFlag xmlns="" xmlns:ma14="http://schemas.microsoft.com/office/mac/drawingml/2011/main" val="0"/>
             </a:ext>
           </a:extLst>
         </p:spPr>
@@ -1492,7 +1493,7 @@
           </a:prstGeom>
           <a:extLst>
             <a:ext uri="{C572A759-6A51-4108-AA02-DFA0A04FC94B}">
-              <ma14:wrappingTextBoxFlag xmlns:ma14="http://schemas.microsoft.com/office/mac/drawingml/2011/main" xmlns="" val="0"/>
+              <ma14:wrappingTextBoxFlag xmlns="" xmlns:ma14="http://schemas.microsoft.com/office/mac/drawingml/2011/main" val="0"/>
             </a:ext>
           </a:extLst>
         </p:spPr>
@@ -1887,16 +1888,13 @@
           <a:bodyPr wrap="square" lIns="0" tIns="0" rIns="0" bIns="0" rtlCol="0" anchor="ctr"/>
           <a:lstStyle/>
           <a:p>
-            <a:pPr marL="0" indent="0">
-              <a:buNone/>
-            </a:pPr>
             <a:r>
               <a:rPr lang="en-US" sz="3000" b="1" dirty="0">
                 <a:solidFill>
                   <a:schemeClr val="accent1"/>
                 </a:solidFill>
               </a:rPr>
-              <a:t>Recycling made fun.</a:t>
+              <a:t>Recycling gamified!</a:t>
             </a:r>
             <a:endParaRPr lang="en-US" sz="3000" dirty="0"/>
           </a:p>
@@ -1993,7 +1991,7 @@
           </a:prstGeom>
           <a:extLst>
             <a:ext uri="{C572A759-6A51-4108-AA02-DFA0A04FC94B}">
-              <ma14:wrappingTextBoxFlag xmlns:ma14="http://schemas.microsoft.com/office/mac/drawingml/2011/main" xmlns="" val="0"/>
+              <ma14:wrappingTextBoxFlag xmlns="" xmlns:ma14="http://schemas.microsoft.com/office/mac/drawingml/2011/main" val="0"/>
             </a:ext>
           </a:extLst>
         </p:spPr>
@@ -2058,7 +2056,7 @@
 
 <file path=ppt/slides/slide10.xml><?xml version="1.0" encoding="utf-8"?>
 <p:sld xmlns:a="http://schemas.openxmlformats.org/drawingml/2006/main" xmlns:r="http://schemas.openxmlformats.org/officeDocument/2006/relationships" xmlns:p="http://schemas.openxmlformats.org/presentationml/2006/main">
-  <p:cSld name="Slide 9">
+  <p:cSld name="Slide 7">
     <p:spTree>
       <p:nvGrpSpPr>
         <p:cNvPr id="1" name=""/>
@@ -2075,14 +2073,18 @@
       </p:grpSpPr>
       <p:sp>
         <p:nvSpPr>
-          <p:cNvPr id="2" name="Eyebrow"/>
-          <p:cNvSpPr txBox="1"/>
-          <p:nvPr/>
-        </p:nvSpPr>
-        <p:spPr>
-          <a:xfrm>
-            <a:off x="731520" y="1600200"/>
-            <a:ext cx="7132320" cy="365760"/>
+          <p:cNvPr id="2" name="Text 1"/>
+          <p:cNvSpPr>
+            <a:spLocks noGrp="1"/>
+          </p:cNvSpPr>
+          <p:nvPr>
+            <p:ph type="title" idx="101" hasCustomPrompt="1"/>
+          </p:nvPr>
+        </p:nvSpPr>
+        <p:spPr>
+          <a:xfrm>
+            <a:off x="548640" y="365760"/>
+            <a:ext cx="11064240" cy="731520"/>
           </a:xfrm>
           <a:prstGeom prst="rect">
             <a:avLst/>
@@ -2094,144 +2096,65 @@
           <a:bodyPr wrap="square" lIns="0" tIns="0" rIns="0" bIns="0" rtlCol="0" anchor="ctr"/>
           <a:lstStyle/>
           <a:p>
-            <a:pPr marL="0" indent="0">
+            <a:pPr marL="0" indent="0" algn="l">
               <a:buNone/>
             </a:pPr>
             <a:r>
-              <a:rPr lang="en-US" sz="1600" b="1" kern="0" spc="400" dirty="0">
-                <a:solidFill>
-                  <a:schemeClr val="accent1"/>
-                </a:solidFill>
-              </a:rPr>
-              <a:t>OUR VISION</a:t>
-            </a:r>
-            <a:endParaRPr lang="en-US" sz="1600" dirty="0"/>
-          </a:p>
-        </p:txBody>
-      </p:sp>
-      <p:sp>
-        <p:nvSpPr>
-          <p:cNvPr id="3" name="Vision"/>
-          <p:cNvSpPr txBox="1"/>
-          <p:nvPr/>
-        </p:nvSpPr>
-        <p:spPr>
-          <a:xfrm>
-            <a:off x="731520" y="2057400"/>
-            <a:ext cx="7132320" cy="1325880"/>
-          </a:xfrm>
-          <a:prstGeom prst="rect">
-            <a:avLst/>
-          </a:prstGeom>
-          <a:noFill/>
-          <a:ln/>
-        </p:spPr>
-        <p:txBody>
-          <a:bodyPr wrap="square" lIns="0" tIns="0" rIns="0" bIns="0" rtlCol="0" anchor="t"/>
-          <a:lstStyle/>
-          <a:p>
-            <a:pPr marL="0" indent="0">
-              <a:buNone/>
-            </a:pPr>
-            <a:r>
-              <a:rPr lang="en-US" sz="3600" b="1" dirty="0">
-                <a:solidFill>
-                  <a:schemeClr val="bg1"/>
-                </a:solidFill>
-              </a:rPr>
-              <a:t>Make sustainability rewarding. Make recycling a habit.</a:t>
-            </a:r>
-            <a:endParaRPr lang="en-US" sz="3600" dirty="0"/>
-          </a:p>
-        </p:txBody>
-      </p:sp>
-      <p:sp>
-        <p:nvSpPr>
-          <p:cNvPr id="4" name="Motto"/>
-          <p:cNvSpPr txBox="1"/>
-          <p:nvPr/>
-        </p:nvSpPr>
-        <p:spPr>
-          <a:xfrm>
-            <a:off x="731520" y="3611880"/>
-            <a:ext cx="7132320" cy="822960"/>
-          </a:xfrm>
-          <a:prstGeom prst="rect">
-            <a:avLst/>
-          </a:prstGeom>
-          <a:noFill/>
-          <a:ln/>
-        </p:spPr>
-        <p:txBody>
-          <a:bodyPr wrap="square" lIns="0" tIns="0" rIns="0" bIns="0" rtlCol="0" anchor="t"/>
-          <a:lstStyle/>
-          <a:p>
-            <a:pPr marL="0" indent="0">
-              <a:buNone/>
-            </a:pPr>
-            <a:r>
-              <a:rPr lang="en-US" sz="2400" b="1" dirty="0">
-                <a:solidFill>
-                  <a:schemeClr val="accent1"/>
-                </a:solidFill>
-              </a:rPr>
-              <a:t>One action. One reward. A better community. A better future!</a:t>
-            </a:r>
-            <a:endParaRPr lang="en-US" sz="2400" dirty="0"/>
-          </a:p>
-        </p:txBody>
-      </p:sp>
-      <p:sp>
-        <p:nvSpPr>
-          <p:cNvPr id="5" name="Thanks"/>
-          <p:cNvSpPr txBox="1"/>
-          <p:nvPr/>
-        </p:nvSpPr>
-        <p:spPr>
-          <a:xfrm>
-            <a:off x="731520" y="4617720"/>
-            <a:ext cx="7132320" cy="457200"/>
-          </a:xfrm>
-          <a:prstGeom prst="rect">
-            <a:avLst/>
-          </a:prstGeom>
-          <a:noFill/>
-          <a:ln/>
-        </p:spPr>
-        <p:txBody>
-          <a:bodyPr wrap="square" lIns="0" tIns="0" rIns="0" bIns="0" rtlCol="0" anchor="ctr"/>
-          <a:lstStyle/>
-          <a:p>
-            <a:pPr marL="0" indent="0">
-              <a:buNone/>
-            </a:pPr>
-            <a:r>
-              <a:rPr lang="en-US" sz="2200">
-                <a:solidFill>
-                  <a:schemeClr val="accent4"/>
-                </a:solidFill>
-              </a:rPr>
-              <a:t>Help us start in Rotkreuz. Thank you!</a:t>
-            </a:r>
-          </a:p>
-        </p:txBody>
-      </p:sp>
-      <p:sp>
-        <p:nvSpPr>
-          <p:cNvPr id="6" name="Badge circle"/>
+              <a:rPr lang="en-US" sz="3600" b="1">
+                <a:solidFill>
+                  <a:schemeClr val="tx1"/>
+                </a:solidFill>
+              </a:rPr>
+              <a:t>Backup: Risks &amp; Our Answers</a:t>
+            </a:r>
+          </a:p>
+        </p:txBody>
+      </p:sp>
+      <p:sp>
+        <p:nvSpPr>
+          <p:cNvPr id="3" name="Risk row 1"/>
           <p:cNvSpPr/>
           <p:nvPr/>
         </p:nvSpPr>
         <p:spPr>
           <a:xfrm>
-            <a:off x="8138160" y="1691640"/>
-            <a:ext cx="3291840" cy="3291840"/>
+            <a:off x="548640" y="1325880"/>
+            <a:ext cx="11064240" cy="777240"/>
+          </a:xfrm>
+          <a:prstGeom prst="roundRect">
+            <a:avLst>
+              <a:gd name="adj" fmla="val 17647"/>
+            </a:avLst>
+          </a:prstGeom>
+          <a:solidFill>
+            <a:srgbClr val="EEF4EE"/>
+          </a:solidFill>
+          <a:ln/>
+        </p:spPr>
+        <p:txBody>
+          <a:bodyPr/>
+          <a:lstStyle/>
+          <a:p>
+            <a:endParaRPr lang="en-CH"/>
+          </a:p>
+        </p:txBody>
+      </p:sp>
+      <p:sp>
+        <p:nvSpPr>
+          <p:cNvPr id="4" name="Risk 1 circle"/>
+          <p:cNvSpPr/>
+          <p:nvPr/>
+        </p:nvSpPr>
+        <p:spPr>
+          <a:xfrm>
+            <a:off x="731520" y="1417320"/>
+            <a:ext cx="594360" cy="594360"/>
           </a:xfrm>
           <a:prstGeom prst="ellipse">
             <a:avLst/>
           </a:prstGeom>
           <a:solidFill>
-            <a:schemeClr val="accent1"/>
+            <a:srgbClr val="F2A33A"/>
           </a:solidFill>
           <a:ln/>
         </p:spPr>
@@ -2245,7 +2168,7 @@
       </p:sp>
       <p:pic>
         <p:nvPicPr>
-          <p:cNvPr id="7" name="Leaf icon" descr="Leaf"/>
+          <p:cNvPr id="5" name="Risk 1 icon" descr="Risk 1"/>
           <p:cNvPicPr>
             <a:picLocks noChangeAspect="1"/>
           </p:cNvPicPr>
@@ -2259,8 +2182,8 @@
         </p:blipFill>
         <p:spPr>
           <a:xfrm>
-            <a:off x="8869680" y="2423160"/>
-            <a:ext cx="1828800" cy="1828800"/>
+            <a:off x="880110" y="1565910"/>
+            <a:ext cx="297180" cy="297180"/>
           </a:xfrm>
           <a:prstGeom prst="rect">
             <a:avLst/>
@@ -2269,7 +2192,699 @@
       </p:pic>
       <p:sp>
         <p:nvSpPr>
-          <p:cNvPr id="25" name="Slide Number Placeholder 0"/>
+          <p:cNvPr id="6" name="Risk 1"/>
+          <p:cNvSpPr txBox="1"/>
+          <p:nvPr/>
+        </p:nvSpPr>
+        <p:spPr>
+          <a:xfrm>
+            <a:off x="1554480" y="1325880"/>
+            <a:ext cx="3383280" cy="777240"/>
+          </a:xfrm>
+          <a:prstGeom prst="rect">
+            <a:avLst/>
+          </a:prstGeom>
+          <a:noFill/>
+          <a:ln/>
+        </p:spPr>
+        <p:txBody>
+          <a:bodyPr wrap="square" lIns="0" tIns="0" rIns="0" bIns="0" rtlCol="0" anchor="ctr"/>
+          <a:lstStyle/>
+          <a:p>
+            <a:pPr marL="0" indent="0">
+              <a:buNone/>
+            </a:pPr>
+            <a:r>
+              <a:rPr lang="en-US" sz="1700" b="1" dirty="0">
+                <a:solidFill>
+                  <a:schemeClr val="tx1"/>
+                </a:solidFill>
+              </a:rPr>
+              <a:t>Funding depends on partners</a:t>
+            </a:r>
+            <a:endParaRPr lang="en-US" sz="1700" dirty="0"/>
+          </a:p>
+        </p:txBody>
+      </p:sp>
+      <p:sp>
+        <p:nvSpPr>
+          <p:cNvPr id="7" name="Answer 1"/>
+          <p:cNvSpPr txBox="1"/>
+          <p:nvPr/>
+        </p:nvSpPr>
+        <p:spPr>
+          <a:xfrm>
+            <a:off x="5029200" y="1325880"/>
+            <a:ext cx="6400800" cy="777240"/>
+          </a:xfrm>
+          <a:prstGeom prst="rect">
+            <a:avLst/>
+          </a:prstGeom>
+          <a:noFill/>
+          <a:ln/>
+        </p:spPr>
+        <p:txBody>
+          <a:bodyPr wrap="square" lIns="0" tIns="0" rIns="0" bIns="0" rtlCol="0" anchor="ctr"/>
+          <a:lstStyle/>
+          <a:p>
+            <a:pPr marL="0" indent="0">
+              <a:buNone/>
+            </a:pPr>
+            <a:r>
+              <a:rPr lang="en-US" sz="1600">
+                <a:solidFill>
+                  <a:schemeClr val="accent5"/>
+                </a:solidFill>
+              </a:rPr>
+              <a:t>Three income sources; from year 2, six partner towns cover running costs</a:t>
+            </a:r>
+          </a:p>
+        </p:txBody>
+      </p:sp>
+      <p:sp>
+        <p:nvSpPr>
+          <p:cNvPr id="8" name="Risk row 2"/>
+          <p:cNvSpPr/>
+          <p:nvPr/>
+        </p:nvSpPr>
+        <p:spPr>
+          <a:xfrm>
+            <a:off x="548640" y="2240280"/>
+            <a:ext cx="11064240" cy="777240"/>
+          </a:xfrm>
+          <a:prstGeom prst="roundRect">
+            <a:avLst>
+              <a:gd name="adj" fmla="val 17647"/>
+            </a:avLst>
+          </a:prstGeom>
+          <a:solidFill>
+            <a:srgbClr val="FFFFFF"/>
+          </a:solidFill>
+          <a:ln/>
+        </p:spPr>
+        <p:txBody>
+          <a:bodyPr/>
+          <a:lstStyle/>
+          <a:p>
+            <a:endParaRPr lang="en-CH"/>
+          </a:p>
+        </p:txBody>
+      </p:sp>
+      <p:sp>
+        <p:nvSpPr>
+          <p:cNvPr id="9" name="Risk 2 circle"/>
+          <p:cNvSpPr/>
+          <p:nvPr/>
+        </p:nvSpPr>
+        <p:spPr>
+          <a:xfrm>
+            <a:off x="731520" y="2331720"/>
+            <a:ext cx="594360" cy="594360"/>
+          </a:xfrm>
+          <a:prstGeom prst="ellipse">
+            <a:avLst/>
+          </a:prstGeom>
+          <a:solidFill>
+            <a:srgbClr val="F2A33A"/>
+          </a:solidFill>
+          <a:ln/>
+        </p:spPr>
+        <p:txBody>
+          <a:bodyPr/>
+          <a:lstStyle/>
+          <a:p>
+            <a:endParaRPr lang="en-CH"/>
+          </a:p>
+        </p:txBody>
+      </p:sp>
+      <p:pic>
+        <p:nvPicPr>
+          <p:cNvPr id="10" name="Risk 2 icon" descr="Risk 2"/>
+          <p:cNvPicPr>
+            <a:picLocks noChangeAspect="1"/>
+          </p:cNvPicPr>
+          <p:nvPr/>
+        </p:nvPicPr>
+        <p:blipFill>
+          <a:blip r:embed="rId4"/>
+          <a:stretch>
+            <a:fillRect/>
+          </a:stretch>
+        </p:blipFill>
+        <p:spPr>
+          <a:xfrm>
+            <a:off x="880110" y="2480310"/>
+            <a:ext cx="297180" cy="297180"/>
+          </a:xfrm>
+          <a:prstGeom prst="rect">
+            <a:avLst/>
+          </a:prstGeom>
+        </p:spPr>
+      </p:pic>
+      <p:sp>
+        <p:nvSpPr>
+          <p:cNvPr id="11" name="Risk 2"/>
+          <p:cNvSpPr txBox="1"/>
+          <p:nvPr/>
+        </p:nvSpPr>
+        <p:spPr>
+          <a:xfrm>
+            <a:off x="1554480" y="2240280"/>
+            <a:ext cx="3383280" cy="777240"/>
+          </a:xfrm>
+          <a:prstGeom prst="rect">
+            <a:avLst/>
+          </a:prstGeom>
+          <a:noFill/>
+          <a:ln/>
+        </p:spPr>
+        <p:txBody>
+          <a:bodyPr wrap="square" lIns="0" tIns="0" rIns="0" bIns="0" rtlCol="0" anchor="ctr"/>
+          <a:lstStyle/>
+          <a:p>
+            <a:pPr marL="0" indent="0">
+              <a:buNone/>
+            </a:pPr>
+            <a:r>
+              <a:rPr lang="en-US" sz="1700" b="1" dirty="0">
+                <a:solidFill>
+                  <a:schemeClr val="tx1"/>
+                </a:solidFill>
+              </a:rPr>
+              <a:t>People cheat for points</a:t>
+            </a:r>
+            <a:endParaRPr lang="en-US" sz="1700" dirty="0"/>
+          </a:p>
+        </p:txBody>
+      </p:sp>
+      <p:sp>
+        <p:nvSpPr>
+          <p:cNvPr id="12" name="Answer 2"/>
+          <p:cNvSpPr txBox="1"/>
+          <p:nvPr/>
+        </p:nvSpPr>
+        <p:spPr>
+          <a:xfrm>
+            <a:off x="5029200" y="2240280"/>
+            <a:ext cx="6400800" cy="777240"/>
+          </a:xfrm>
+          <a:prstGeom prst="rect">
+            <a:avLst/>
+          </a:prstGeom>
+          <a:noFill/>
+          <a:ln/>
+        </p:spPr>
+        <p:txBody>
+          <a:bodyPr wrap="square" lIns="0" tIns="0" rIns="0" bIns="0" rtlCol="0" anchor="ctr"/>
+          <a:lstStyle/>
+          <a:p>
+            <a:pPr marL="0" indent="0">
+              <a:buNone/>
+            </a:pPr>
+            <a:r>
+              <a:rPr lang="en-US" sz="1600" dirty="0">
+                <a:solidFill>
+                  <a:schemeClr val="accent5"/>
+                </a:solidFill>
+              </a:rPr>
+              <a:t>QR check-in at real collection points, daily point caps, manual review first until enough data to build fraud detection model!</a:t>
+            </a:r>
+          </a:p>
+        </p:txBody>
+      </p:sp>
+      <p:sp>
+        <p:nvSpPr>
+          <p:cNvPr id="13" name="Risk row 3"/>
+          <p:cNvSpPr/>
+          <p:nvPr/>
+        </p:nvSpPr>
+        <p:spPr>
+          <a:xfrm>
+            <a:off x="548640" y="3154680"/>
+            <a:ext cx="11064240" cy="777240"/>
+          </a:xfrm>
+          <a:prstGeom prst="roundRect">
+            <a:avLst>
+              <a:gd name="adj" fmla="val 17647"/>
+            </a:avLst>
+          </a:prstGeom>
+          <a:solidFill>
+            <a:srgbClr val="EEF4EE"/>
+          </a:solidFill>
+          <a:ln/>
+        </p:spPr>
+        <p:txBody>
+          <a:bodyPr/>
+          <a:lstStyle/>
+          <a:p>
+            <a:endParaRPr lang="en-CH"/>
+          </a:p>
+        </p:txBody>
+      </p:sp>
+      <p:sp>
+        <p:nvSpPr>
+          <p:cNvPr id="14" name="Risk 3 circle"/>
+          <p:cNvSpPr/>
+          <p:nvPr/>
+        </p:nvSpPr>
+        <p:spPr>
+          <a:xfrm>
+            <a:off x="731520" y="3246120"/>
+            <a:ext cx="594360" cy="594360"/>
+          </a:xfrm>
+          <a:prstGeom prst="ellipse">
+            <a:avLst/>
+          </a:prstGeom>
+          <a:solidFill>
+            <a:srgbClr val="F2A33A"/>
+          </a:solidFill>
+          <a:ln/>
+        </p:spPr>
+        <p:txBody>
+          <a:bodyPr/>
+          <a:lstStyle/>
+          <a:p>
+            <a:endParaRPr lang="en-CH"/>
+          </a:p>
+        </p:txBody>
+      </p:sp>
+      <p:pic>
+        <p:nvPicPr>
+          <p:cNvPr id="15" name="Risk 3 icon" descr="Risk 3"/>
+          <p:cNvPicPr>
+            <a:picLocks noChangeAspect="1"/>
+          </p:cNvPicPr>
+          <p:nvPr/>
+        </p:nvPicPr>
+        <p:blipFill>
+          <a:blip r:embed="rId5"/>
+          <a:stretch>
+            <a:fillRect/>
+          </a:stretch>
+        </p:blipFill>
+        <p:spPr>
+          <a:xfrm>
+            <a:off x="880110" y="3394710"/>
+            <a:ext cx="297180" cy="297180"/>
+          </a:xfrm>
+          <a:prstGeom prst="rect">
+            <a:avLst/>
+          </a:prstGeom>
+        </p:spPr>
+      </p:pic>
+      <p:sp>
+        <p:nvSpPr>
+          <p:cNvPr id="16" name="Risk 3"/>
+          <p:cNvSpPr txBox="1"/>
+          <p:nvPr/>
+        </p:nvSpPr>
+        <p:spPr>
+          <a:xfrm>
+            <a:off x="1554480" y="3154680"/>
+            <a:ext cx="3383280" cy="777240"/>
+          </a:xfrm>
+          <a:prstGeom prst="rect">
+            <a:avLst/>
+          </a:prstGeom>
+          <a:noFill/>
+          <a:ln/>
+        </p:spPr>
+        <p:txBody>
+          <a:bodyPr wrap="square" lIns="0" tIns="0" rIns="0" bIns="0" rtlCol="0" anchor="ctr"/>
+          <a:lstStyle/>
+          <a:p>
+            <a:pPr marL="0" indent="0">
+              <a:buNone/>
+            </a:pPr>
+            <a:r>
+              <a:rPr lang="en-US" sz="1700" b="1" dirty="0">
+                <a:solidFill>
+                  <a:schemeClr val="tx1"/>
+                </a:solidFill>
+              </a:rPr>
+              <a:t>Rewards get expensive</a:t>
+            </a:r>
+            <a:endParaRPr lang="en-US" sz="1700" dirty="0"/>
+          </a:p>
+        </p:txBody>
+      </p:sp>
+      <p:sp>
+        <p:nvSpPr>
+          <p:cNvPr id="17" name="Answer 3"/>
+          <p:cNvSpPr txBox="1"/>
+          <p:nvPr/>
+        </p:nvSpPr>
+        <p:spPr>
+          <a:xfrm>
+            <a:off x="5029200" y="3154680"/>
+            <a:ext cx="6400800" cy="777240"/>
+          </a:xfrm>
+          <a:prstGeom prst="rect">
+            <a:avLst/>
+          </a:prstGeom>
+          <a:noFill/>
+          <a:ln/>
+        </p:spPr>
+        <p:txBody>
+          <a:bodyPr wrap="square" lIns="0" tIns="0" rIns="0" bIns="0" rtlCol="0" anchor="ctr"/>
+          <a:lstStyle/>
+          <a:p>
+            <a:pPr marL="0" indent="0">
+              <a:buNone/>
+            </a:pPr>
+            <a:r>
+              <a:rPr lang="en-US" sz="1600" dirty="0">
+                <a:solidFill>
+                  <a:schemeClr val="accent5"/>
+                </a:solidFill>
+              </a:rPr>
+              <a:t>Rewards are sponsored by local businesses in exchange for visibility and a chance to sell things at our events</a:t>
+            </a:r>
+            <a:endParaRPr lang="en-US" sz="1600" dirty="0"/>
+          </a:p>
+        </p:txBody>
+      </p:sp>
+      <p:sp>
+        <p:nvSpPr>
+          <p:cNvPr id="18" name="Risk row 4"/>
+          <p:cNvSpPr/>
+          <p:nvPr/>
+        </p:nvSpPr>
+        <p:spPr>
+          <a:xfrm>
+            <a:off x="548640" y="4069080"/>
+            <a:ext cx="11064240" cy="777240"/>
+          </a:xfrm>
+          <a:prstGeom prst="roundRect">
+            <a:avLst>
+              <a:gd name="adj" fmla="val 17647"/>
+            </a:avLst>
+          </a:prstGeom>
+          <a:solidFill>
+            <a:srgbClr val="FFFFFF"/>
+          </a:solidFill>
+          <a:ln/>
+        </p:spPr>
+        <p:txBody>
+          <a:bodyPr/>
+          <a:lstStyle/>
+          <a:p>
+            <a:endParaRPr lang="en-CH"/>
+          </a:p>
+        </p:txBody>
+      </p:sp>
+      <p:sp>
+        <p:nvSpPr>
+          <p:cNvPr id="19" name="Risk 4 circle"/>
+          <p:cNvSpPr/>
+          <p:nvPr/>
+        </p:nvSpPr>
+        <p:spPr>
+          <a:xfrm>
+            <a:off x="731520" y="4160520"/>
+            <a:ext cx="594360" cy="594360"/>
+          </a:xfrm>
+          <a:prstGeom prst="ellipse">
+            <a:avLst/>
+          </a:prstGeom>
+          <a:solidFill>
+            <a:srgbClr val="F2A33A"/>
+          </a:solidFill>
+          <a:ln/>
+        </p:spPr>
+        <p:txBody>
+          <a:bodyPr/>
+          <a:lstStyle/>
+          <a:p>
+            <a:endParaRPr lang="en-CH"/>
+          </a:p>
+        </p:txBody>
+      </p:sp>
+      <p:pic>
+        <p:nvPicPr>
+          <p:cNvPr id="20" name="Risk 4 icon" descr="Risk 4"/>
+          <p:cNvPicPr>
+            <a:picLocks noChangeAspect="1"/>
+          </p:cNvPicPr>
+          <p:nvPr/>
+        </p:nvPicPr>
+        <p:blipFill>
+          <a:blip r:embed="rId6"/>
+          <a:stretch>
+            <a:fillRect/>
+          </a:stretch>
+        </p:blipFill>
+        <p:spPr>
+          <a:xfrm>
+            <a:off x="880110" y="4309110"/>
+            <a:ext cx="297180" cy="297180"/>
+          </a:xfrm>
+          <a:prstGeom prst="rect">
+            <a:avLst/>
+          </a:prstGeom>
+        </p:spPr>
+      </p:pic>
+      <p:sp>
+        <p:nvSpPr>
+          <p:cNvPr id="21" name="Risk 4"/>
+          <p:cNvSpPr txBox="1"/>
+          <p:nvPr/>
+        </p:nvSpPr>
+        <p:spPr>
+          <a:xfrm>
+            <a:off x="1554480" y="4069080"/>
+            <a:ext cx="3383280" cy="777240"/>
+          </a:xfrm>
+          <a:prstGeom prst="rect">
+            <a:avLst/>
+          </a:prstGeom>
+          <a:noFill/>
+          <a:ln/>
+        </p:spPr>
+        <p:txBody>
+          <a:bodyPr wrap="square" lIns="0" tIns="0" rIns="0" bIns="0" rtlCol="0" anchor="ctr"/>
+          <a:lstStyle/>
+          <a:p>
+            <a:pPr marL="0" indent="0">
+              <a:buNone/>
+            </a:pPr>
+            <a:r>
+              <a:rPr lang="en-US" sz="1700" b="1" dirty="0">
+                <a:solidFill>
+                  <a:schemeClr val="tx1"/>
+                </a:solidFill>
+              </a:rPr>
+              <a:t>The novelty wears off</a:t>
+            </a:r>
+            <a:endParaRPr lang="en-US" sz="1700" dirty="0"/>
+          </a:p>
+        </p:txBody>
+      </p:sp>
+      <p:sp>
+        <p:nvSpPr>
+          <p:cNvPr id="22" name="Answer 4"/>
+          <p:cNvSpPr txBox="1"/>
+          <p:nvPr/>
+        </p:nvSpPr>
+        <p:spPr>
+          <a:xfrm>
+            <a:off x="5029200" y="4069080"/>
+            <a:ext cx="6400800" cy="777240"/>
+          </a:xfrm>
+          <a:prstGeom prst="rect">
+            <a:avLst/>
+          </a:prstGeom>
+          <a:noFill/>
+          <a:ln/>
+        </p:spPr>
+        <p:txBody>
+          <a:bodyPr wrap="square" lIns="0" tIns="0" rIns="0" bIns="0" rtlCol="0" anchor="ctr"/>
+          <a:lstStyle/>
+          <a:p>
+            <a:pPr marL="0" indent="0">
+              <a:buNone/>
+            </a:pPr>
+            <a:r>
+              <a:rPr lang="en-US" sz="1600" dirty="0">
+                <a:solidFill>
+                  <a:schemeClr val="accent5"/>
+                </a:solidFill>
+              </a:rPr>
+              <a:t>Seasonal and team challenges plus local events keep it fresh and exciting!</a:t>
+            </a:r>
+          </a:p>
+        </p:txBody>
+      </p:sp>
+      <p:sp>
+        <p:nvSpPr>
+          <p:cNvPr id="23" name="Risk row 5"/>
+          <p:cNvSpPr/>
+          <p:nvPr/>
+        </p:nvSpPr>
+        <p:spPr>
+          <a:xfrm>
+            <a:off x="548640" y="4983480"/>
+            <a:ext cx="11064240" cy="777240"/>
+          </a:xfrm>
+          <a:prstGeom prst="roundRect">
+            <a:avLst>
+              <a:gd name="adj" fmla="val 17647"/>
+            </a:avLst>
+          </a:prstGeom>
+          <a:solidFill>
+            <a:srgbClr val="EEF4EE"/>
+          </a:solidFill>
+          <a:ln/>
+        </p:spPr>
+        <p:txBody>
+          <a:bodyPr/>
+          <a:lstStyle/>
+          <a:p>
+            <a:endParaRPr lang="en-CH"/>
+          </a:p>
+        </p:txBody>
+      </p:sp>
+      <p:sp>
+        <p:nvSpPr>
+          <p:cNvPr id="24" name="Risk 5 circle"/>
+          <p:cNvSpPr/>
+          <p:nvPr/>
+        </p:nvSpPr>
+        <p:spPr>
+          <a:xfrm>
+            <a:off x="731520" y="5074920"/>
+            <a:ext cx="594360" cy="594360"/>
+          </a:xfrm>
+          <a:prstGeom prst="ellipse">
+            <a:avLst/>
+          </a:prstGeom>
+          <a:solidFill>
+            <a:srgbClr val="F2A33A"/>
+          </a:solidFill>
+          <a:ln/>
+        </p:spPr>
+        <p:txBody>
+          <a:bodyPr/>
+          <a:lstStyle/>
+          <a:p>
+            <a:endParaRPr lang="en-CH"/>
+          </a:p>
+        </p:txBody>
+      </p:sp>
+      <p:pic>
+        <p:nvPicPr>
+          <p:cNvPr id="25" name="Risk 5 icon" descr="Risk 5"/>
+          <p:cNvPicPr>
+            <a:picLocks noChangeAspect="1"/>
+          </p:cNvPicPr>
+          <p:nvPr/>
+        </p:nvPicPr>
+        <p:blipFill>
+          <a:blip r:embed="rId7"/>
+          <a:stretch>
+            <a:fillRect/>
+          </a:stretch>
+        </p:blipFill>
+        <p:spPr>
+          <a:xfrm>
+            <a:off x="880110" y="5223510"/>
+            <a:ext cx="297180" cy="297180"/>
+          </a:xfrm>
+          <a:prstGeom prst="rect">
+            <a:avLst/>
+          </a:prstGeom>
+        </p:spPr>
+      </p:pic>
+      <p:sp>
+        <p:nvSpPr>
+          <p:cNvPr id="26" name="Risk 5"/>
+          <p:cNvSpPr txBox="1"/>
+          <p:nvPr/>
+        </p:nvSpPr>
+        <p:spPr>
+          <a:xfrm>
+            <a:off x="1554480" y="4983480"/>
+            <a:ext cx="3383280" cy="777240"/>
+          </a:xfrm>
+          <a:prstGeom prst="rect">
+            <a:avLst/>
+          </a:prstGeom>
+          <a:noFill/>
+          <a:ln/>
+        </p:spPr>
+        <p:txBody>
+          <a:bodyPr wrap="square" lIns="0" tIns="0" rIns="0" bIns="0" rtlCol="0" anchor="ctr"/>
+          <a:lstStyle/>
+          <a:p>
+            <a:pPr marL="0" indent="0">
+              <a:buNone/>
+            </a:pPr>
+            <a:r>
+              <a:rPr lang="en-US" sz="1700" b="1" dirty="0">
+                <a:solidFill>
+                  <a:schemeClr val="tx1"/>
+                </a:solidFill>
+              </a:rPr>
+              <a:t>Privacy</a:t>
+            </a:r>
+            <a:endParaRPr lang="en-US" sz="1700" dirty="0"/>
+          </a:p>
+        </p:txBody>
+      </p:sp>
+      <p:sp>
+        <p:nvSpPr>
+          <p:cNvPr id="27" name="Answer 5"/>
+          <p:cNvSpPr txBox="1"/>
+          <p:nvPr/>
+        </p:nvSpPr>
+        <p:spPr>
+          <a:xfrm>
+            <a:off x="5029200" y="4983480"/>
+            <a:ext cx="6400800" cy="777240"/>
+          </a:xfrm>
+          <a:prstGeom prst="rect">
+            <a:avLst/>
+          </a:prstGeom>
+          <a:noFill/>
+          <a:ln/>
+        </p:spPr>
+        <p:txBody>
+          <a:bodyPr wrap="square" lIns="0" tIns="0" rIns="0" bIns="0" rtlCol="0" anchor="ctr"/>
+          <a:lstStyle/>
+          <a:p>
+            <a:pPr marL="0" indent="0">
+              <a:buNone/>
+            </a:pPr>
+            <a:r>
+              <a:rPr lang="en-US" sz="1600" dirty="0">
+                <a:solidFill>
+                  <a:schemeClr val="accent5"/>
+                </a:solidFill>
+              </a:rPr>
+              <a:t>No ads, no selling data, our partners only see anonymized totals (Swiss </a:t>
+            </a:r>
+            <a:r>
+              <a:rPr lang="en-US" sz="1600" dirty="0" err="1">
+                <a:solidFill>
+                  <a:schemeClr val="accent5"/>
+                </a:solidFill>
+              </a:rPr>
+              <a:t>nFADP</a:t>
+            </a:r>
+            <a:r>
+              <a:rPr lang="en-US" sz="1600" dirty="0">
+                <a:solidFill>
+                  <a:schemeClr val="accent5"/>
+                </a:solidFill>
+              </a:rPr>
+              <a:t>) We are honest and open how we use your data!</a:t>
+            </a:r>
+          </a:p>
+        </p:txBody>
+      </p:sp>
+      <p:sp>
+        <p:nvSpPr>
+          <p:cNvPr id="28" name="Slide Number Placeholder 0"/>
           <p:cNvSpPr>
             <a:spLocks noGrp="1"/>
           </p:cNvSpPr>
@@ -2287,7 +2902,7 @@
           </a:prstGeom>
           <a:extLst>
             <a:ext uri="{C572A759-6A51-4108-AA02-DFA0A04FC94B}">
-              <ma14:wrappingTextBoxFlag xmlns:ma14="http://schemas.microsoft.com/office/mac/drawingml/2011/main" xmlns="" val="0"/>
+              <ma14:wrappingTextBoxFlag xmlns="" xmlns:ma14="http://schemas.microsoft.com/office/mac/drawingml/2011/main" val="0"/>
             </a:ext>
           </a:extLst>
         </p:spPr>
@@ -2297,7 +2912,7 @@
             <a:lvl1pPr>
               <a:defRPr sz="1000">
                 <a:solidFill>
-                  <a:schemeClr val="accent4"/>
+                  <a:schemeClr val="accent5"/>
                 </a:solidFill>
               </a:defRPr>
             </a:lvl1pPr>
@@ -2306,7 +2921,7 @@
             <a:pPr algn="r"/>
             <a:fld id="{F7021451-1387-4CA6-816F-3879F97B5CBC}" type="slidenum">
               <a:rPr lang="en-US" b="0"/>
-              <a:t>9</a:t>
+              <a:t>10</a:t>
             </a:fld>
             <a:endParaRPr lang="en-US"/>
           </a:p>
@@ -2689,15 +3304,15 @@
               <a:buNone/>
             </a:pPr>
             <a:r>
-              <a:rPr lang="en-US" sz="2100" b="1">
+              <a:rPr lang="en-US" sz="2100" b="1" dirty="0">
                 <a:solidFill>
                   <a:schemeClr val="accent1"/>
                 </a:solidFill>
               </a:rPr>
-              <a:t xml:space="preserve">Our bet: </a:t>
-            </a:r>
-            <a:r>
-              <a:rPr lang="en-US" sz="2100">
+              <a:t>Our hypothesis: </a:t>
+            </a:r>
+            <a:r>
+              <a:rPr lang="en-US" sz="2100" dirty="0">
                 <a:solidFill>
                   <a:schemeClr val="bg1"/>
                 </a:solidFill>
@@ -3008,7 +3623,7 @@
           </a:prstGeom>
           <a:extLst>
             <a:ext uri="{C572A759-6A51-4108-AA02-DFA0A04FC94B}">
-              <ma14:wrappingTextBoxFlag xmlns:ma14="http://schemas.microsoft.com/office/mac/drawingml/2011/main" xmlns="" val="0"/>
+              <ma14:wrappingTextBoxFlag xmlns="" xmlns:ma14="http://schemas.microsoft.com/office/mac/drawingml/2011/main" val="0"/>
             </a:ext>
           </a:extLst>
         </p:spPr>
@@ -3576,13 +4191,22 @@
               <a:buNone/>
             </a:pPr>
             <a:r>
-              <a:rPr lang="en-US" sz="1700">
+              <a:rPr lang="en-US" sz="1700" dirty="0">
                 <a:solidFill>
                   <a:schemeClr val="tx1"/>
                 </a:solidFill>
               </a:rPr>
-              <a:t>Climb the class and town leaderboard</a:t>
-            </a:r>
+              <a:t>Climb the class, town leaderboard</a:t>
+            </a:r>
+            <a:r>
+              <a:rPr lang="en-US" sz="1700" dirty="0"/>
+              <a:t> and compete against your friends!</a:t>
+            </a:r>
+            <a:endParaRPr lang="en-US" sz="1700" dirty="0">
+              <a:solidFill>
+                <a:schemeClr val="tx1"/>
+              </a:solidFill>
+            </a:endParaRPr>
           </a:p>
         </p:txBody>
       </p:sp>
@@ -3878,12 +4502,12 @@
               <a:buNone/>
             </a:pPr>
             <a:r>
-              <a:rPr lang="en-US" sz="1700">
+              <a:rPr lang="en-US" sz="1700" dirty="0">
                 <a:solidFill>
                   <a:schemeClr val="tx1"/>
                 </a:solidFill>
               </a:rPr>
-              <a:t>Join town challenges with friends</a:t>
+              <a:t>Join challenges with friends</a:t>
             </a:r>
           </a:p>
         </p:txBody>
@@ -3996,7 +4620,7 @@
           </a:prstGeom>
           <a:extLst>
             <a:ext uri="{C572A759-6A51-4108-AA02-DFA0A04FC94B}">
-              <ma14:wrappingTextBoxFlag xmlns:ma14="http://schemas.microsoft.com/office/mac/drawingml/2011/main" xmlns="" val="0"/>
+              <ma14:wrappingTextBoxFlag xmlns="" xmlns:ma14="http://schemas.microsoft.com/office/mac/drawingml/2011/main" val="0"/>
             </a:ext>
           </a:extLst>
         </p:spPr>
@@ -4121,7 +4745,7 @@
           <p:nvPr/>
         </p:nvPicPr>
         <p:blipFill>
-          <a:blip r:embed="rId2"/>
+          <a:blip r:embed="rId3"/>
           <a:stretch>
             <a:fillRect/>
           </a:stretch>
@@ -4174,7 +4798,7 @@
                   <a:schemeClr val="tx1"/>
                 </a:solidFill>
               </a:rPr>
-              <a:t xml:space="preserve"> (first customer we pitch): CHF 0.40 per resident a year ≈ CHF 4,400</a:t>
+              <a:t> (first customer we pitch): CHF 0.40 per resident a year ≈ CHF 4,400</a:t>
             </a:r>
           </a:p>
         </p:txBody>
@@ -4215,7 +4839,7 @@
           <p:nvPr/>
         </p:nvPicPr>
         <p:blipFill>
-          <a:blip r:embed="rId6"/>
+          <a:blip r:embed="rId4"/>
           <a:stretch>
             <a:fillRect/>
           </a:stretch>
@@ -4255,7 +4879,7 @@
               <a:buNone/>
             </a:pPr>
             <a:r>
-              <a:rPr lang="en-US" sz="1800" b="1">
+              <a:rPr lang="en-US" sz="1800" b="1" dirty="0">
                 <a:solidFill>
                   <a:schemeClr val="tx1"/>
                 </a:solidFill>
@@ -4263,13 +4887,22 @@
               <a:t>Local shops &amp; cafés</a:t>
             </a:r>
             <a:r>
-              <a:rPr lang="en-US" sz="1800">
+              <a:rPr lang="en-US" sz="1800" dirty="0">
                 <a:solidFill>
                   <a:schemeClr val="tx1"/>
                 </a:solidFill>
               </a:rPr>
               <a:t>: CHF 30 a month for visibility, and they fund the rewards</a:t>
             </a:r>
+            <a:r>
+              <a:rPr lang="en-US" dirty="0"/>
+              <a:t>, small discounts or a free coffee!</a:t>
+            </a:r>
+            <a:endParaRPr lang="en-US" sz="1800" dirty="0">
+              <a:solidFill>
+                <a:schemeClr val="tx1"/>
+              </a:solidFill>
+            </a:endParaRPr>
           </a:p>
         </p:txBody>
       </p:sp>
@@ -4309,7 +4942,7 @@
           <p:nvPr/>
         </p:nvPicPr>
         <p:blipFill>
-          <a:blip r:embed="rId7"/>
+          <a:blip r:embed="rId5"/>
           <a:stretch>
             <a:fillRect/>
           </a:stretch>
@@ -4349,7 +4982,7 @@
               <a:buNone/>
             </a:pPr>
             <a:r>
-              <a:rPr lang="en-US" sz="1800" b="1">
+              <a:rPr lang="en-US" sz="1800" b="1" dirty="0">
                 <a:solidFill>
                   <a:schemeClr val="tx1"/>
                 </a:solidFill>
@@ -4357,12 +4990,12 @@
               <a:t>Users</a:t>
             </a:r>
             <a:r>
-              <a:rPr lang="en-US" sz="1800">
+              <a:rPr lang="en-US" sz="1800" dirty="0">
                 <a:solidFill>
                   <a:schemeClr val="tx1"/>
                 </a:solidFill>
               </a:rPr>
-              <a:t>: always free. No ads, no selling data.</a:t>
+              <a:t>: always free. No ads, no selling data. You are in charge</a:t>
             </a:r>
           </a:p>
         </p:txBody>
@@ -4417,24 +5050,21 @@
           <a:bodyPr wrap="square" lIns="0" tIns="0" rIns="0" bIns="0" rtlCol="0" anchor="ctr"/>
           <a:lstStyle/>
           <a:p>
-            <a:pPr marL="0" indent="0">
-              <a:buNone/>
-            </a:pPr>
-            <a:r>
-              <a:rPr lang="en-US" sz="2100" b="1">
+            <a:r>
+              <a:rPr lang="en-US" sz="2100" b="1" dirty="0">
                 <a:solidFill>
                   <a:schemeClr val="accent1"/>
                 </a:solidFill>
               </a:rPr>
-              <a:t xml:space="preserve">Scale: </a:t>
-            </a:r>
-            <a:r>
-              <a:rPr lang="en-US" sz="2100">
+              <a:t>Scale: </a:t>
+            </a:r>
+            <a:r>
+              <a:rPr lang="en-US" sz="2100" dirty="0">
                 <a:solidFill>
                   <a:schemeClr val="bg1"/>
                 </a:solidFill>
               </a:rPr>
-              <a:t>6 towns like Risch ≈ CHF 26,000 a year, enough for a part-time developer.</a:t>
+              <a:t>6 towns like Risch ≈ CHF 26,000 a year, enough for keeping this self sufficient.</a:t>
             </a:r>
           </a:p>
         </p:txBody>
@@ -4733,7 +5363,7 @@
           </a:prstGeom>
           <a:extLst>
             <a:ext uri="{C572A759-6A51-4108-AA02-DFA0A04FC94B}">
-              <ma14:wrappingTextBoxFlag xmlns:ma14="http://schemas.microsoft.com/office/mac/drawingml/2011/main" xmlns="" val="0"/>
+              <ma14:wrappingTextBoxFlag xmlns="" xmlns:ma14="http://schemas.microsoft.com/office/mac/drawingml/2011/main" val="0"/>
             </a:ext>
           </a:extLst>
         </p:spPr>
@@ -4752,7 +5382,7 @@
             <a:pPr algn="r"/>
             <a:fld id="{F7021451-1387-4CA6-816F-3879F97B5CBC}" type="slidenum">
               <a:rPr lang="en-US" b="0"/>
-              <a:t>2</a:t>
+              <a:t>4</a:t>
             </a:fld>
             <a:endParaRPr lang="en-US"/>
           </a:p>
@@ -4767,688 +5397,6 @@
 </file>
 
 <file path=ppt/slides/slide5.xml><?xml version="1.0" encoding="utf-8"?>
-<p:sld xmlns:a="http://schemas.openxmlformats.org/drawingml/2006/main" xmlns:r="http://schemas.openxmlformats.org/officeDocument/2006/relationships" xmlns:p="http://schemas.openxmlformats.org/presentationml/2006/main">
-  <p:cSld name="Slide 4">
-    <p:spTree>
-      <p:nvGrpSpPr>
-        <p:cNvPr id="1" name=""/>
-        <p:cNvGrpSpPr/>
-        <p:nvPr/>
-      </p:nvGrpSpPr>
-      <p:grpSpPr>
-        <a:xfrm>
-          <a:off x="0" y="0"/>
-          <a:ext cx="0" cy="0"/>
-          <a:chOff x="0" y="0"/>
-          <a:chExt cx="0" cy="0"/>
-        </a:xfrm>
-      </p:grpSpPr>
-      <p:sp>
-        <p:nvSpPr>
-          <p:cNvPr id="2" name="Text 1"/>
-          <p:cNvSpPr>
-            <a:spLocks noGrp="1"/>
-          </p:cNvSpPr>
-          <p:nvPr>
-            <p:ph type="title" idx="101" hasCustomPrompt="1"/>
-          </p:nvPr>
-        </p:nvSpPr>
-        <p:spPr>
-          <a:xfrm>
-            <a:off x="548640" y="365760"/>
-            <a:ext cx="11064240" cy="731520"/>
-          </a:xfrm>
-          <a:prstGeom prst="rect">
-            <a:avLst/>
-          </a:prstGeom>
-          <a:noFill/>
-          <a:ln/>
-        </p:spPr>
-        <p:txBody>
-          <a:bodyPr wrap="square" lIns="0" tIns="0" rIns="0" bIns="0" rtlCol="0" anchor="ctr"/>
-          <a:lstStyle/>
-          <a:p>
-            <a:pPr marL="0" indent="0" algn="l">
-              <a:buNone/>
-            </a:pPr>
-            <a:r>
-              <a:rPr lang="en-US" sz="3600" b="1">
-                <a:solidFill>
-                  <a:schemeClr val="tx1"/>
-                </a:solidFill>
-              </a:rPr>
-              <a:t>Progress &amp; Next Steps</a:t>
-            </a:r>
-          </a:p>
-        </p:txBody>
-      </p:sp>
-      <p:sp>
-        <p:nvSpPr>
-          <p:cNvPr id="3" name="Subtitle"/>
-          <p:cNvSpPr txBox="1"/>
-          <p:nvPr/>
-        </p:nvSpPr>
-        <p:spPr>
-          <a:xfrm>
-            <a:off x="548640" y="1143000"/>
-            <a:ext cx="11064240" cy="457200"/>
-          </a:xfrm>
-          <a:prstGeom prst="rect">
-            <a:avLst/>
-          </a:prstGeom>
-          <a:noFill/>
-          <a:ln/>
-        </p:spPr>
-        <p:txBody>
-          <a:bodyPr wrap="square" lIns="0" tIns="0" rIns="0" bIns="0" rtlCol="0" anchor="ctr"/>
-          <a:lstStyle/>
-          <a:p>
-            <a:pPr marL="0" indent="0">
-              <a:buNone/>
-            </a:pPr>
-            <a:r>
-              <a:rPr lang="en-US" sz="2200" b="1">
-                <a:solidFill>
-                  <a:schemeClr val="tx2"/>
-                </a:solidFill>
-              </a:rPr>
-              <a:t>Built in 24 hours. Ready for a pilot in Rotkreuz.</a:t>
-            </a:r>
-          </a:p>
-        </p:txBody>
-      </p:sp>
-      <p:sp>
-        <p:nvSpPr>
-          <p:cNvPr id="4" name="Partner card 1"/>
-          <p:cNvSpPr/>
-          <p:nvPr/>
-        </p:nvSpPr>
-        <p:spPr>
-          <a:xfrm>
-            <a:off x="548640" y="1874520"/>
-            <a:ext cx="3566160" cy="2743200"/>
-          </a:xfrm>
-          <a:prstGeom prst="roundRect">
-            <a:avLst>
-              <a:gd name="adj" fmla="val 5000"/>
-            </a:avLst>
-          </a:prstGeom>
-          <a:solidFill>
-            <a:srgbClr val="EEF4EE"/>
-          </a:solidFill>
-          <a:ln/>
-        </p:spPr>
-        <p:txBody>
-          <a:bodyPr/>
-          <a:lstStyle/>
-          <a:p>
-            <a:endParaRPr lang="en-CH"/>
-          </a:p>
-        </p:txBody>
-      </p:sp>
-      <p:sp>
-        <p:nvSpPr>
-          <p:cNvPr id="5" name="Municipalities circle"/>
-          <p:cNvSpPr/>
-          <p:nvPr/>
-        </p:nvSpPr>
-        <p:spPr>
-          <a:xfrm>
-            <a:off x="822960" y="2103120"/>
-            <a:ext cx="777240" cy="777240"/>
-          </a:xfrm>
-          <a:prstGeom prst="ellipse">
-            <a:avLst/>
-          </a:prstGeom>
-          <a:solidFill>
-            <a:srgbClr val="23704F"/>
-          </a:solidFill>
-          <a:ln/>
-        </p:spPr>
-        <p:txBody>
-          <a:bodyPr/>
-          <a:lstStyle/>
-          <a:p>
-            <a:endParaRPr lang="en-CH"/>
-          </a:p>
-        </p:txBody>
-      </p:sp>
-      <p:pic>
-        <p:nvPicPr>
-          <p:cNvPr id="6" name="Municipalities icon" descr="Municipalities"/>
-          <p:cNvPicPr>
-            <a:picLocks noChangeAspect="1"/>
-          </p:cNvPicPr>
-          <p:nvPr/>
-        </p:nvPicPr>
-        <p:blipFill>
-          <a:blip r:embed="rId6"/>
-          <a:stretch>
-            <a:fillRect/>
-          </a:stretch>
-        </p:blipFill>
-        <p:spPr>
-          <a:xfrm>
-            <a:off x="1017270" y="2297430"/>
-            <a:ext cx="388620" cy="388620"/>
-          </a:xfrm>
-          <a:prstGeom prst="rect">
-            <a:avLst/>
-          </a:prstGeom>
-        </p:spPr>
-      </p:pic>
-      <p:sp>
-        <p:nvSpPr>
-          <p:cNvPr id="7" name="Municipalities header"/>
-          <p:cNvSpPr txBox="1"/>
-          <p:nvPr/>
-        </p:nvSpPr>
-        <p:spPr>
-          <a:xfrm>
-            <a:off x="822960" y="3017520"/>
-            <a:ext cx="3017520" cy="457200"/>
-          </a:xfrm>
-          <a:prstGeom prst="rect">
-            <a:avLst/>
-          </a:prstGeom>
-          <a:noFill/>
-          <a:ln/>
-        </p:spPr>
-        <p:txBody>
-          <a:bodyPr wrap="square" lIns="0" tIns="0" rIns="0" bIns="0" rtlCol="0" anchor="ctr"/>
-          <a:lstStyle/>
-          <a:p>
-            <a:pPr marL="0" indent="0">
-              <a:buNone/>
-            </a:pPr>
-            <a:r>
-              <a:rPr lang="en-US" sz="2200" b="1">
-                <a:solidFill>
-                  <a:schemeClr val="tx1"/>
-                </a:solidFill>
-              </a:rPr>
-              <a:t>Today</a:t>
-            </a:r>
-          </a:p>
-        </p:txBody>
-      </p:sp>
-      <p:sp>
-        <p:nvSpPr>
-          <p:cNvPr id="8" name="Municipalities text"/>
-          <p:cNvSpPr txBox="1"/>
-          <p:nvPr/>
-        </p:nvSpPr>
-        <p:spPr>
-          <a:xfrm>
-            <a:off x="822960" y="3520440"/>
-            <a:ext cx="3017520" cy="1005840"/>
-          </a:xfrm>
-          <a:prstGeom prst="rect">
-            <a:avLst/>
-          </a:prstGeom>
-          <a:noFill/>
-          <a:ln/>
-        </p:spPr>
-        <p:txBody>
-          <a:bodyPr wrap="square" lIns="0" tIns="0" rIns="0" bIns="0" rtlCol="0" anchor="t"/>
-          <a:lstStyle/>
-          <a:p>
-            <a:pPr marL="0" indent="0">
-              <a:buNone/>
-            </a:pPr>
-            <a:r>
-              <a:rPr lang="en-US" sz="1600">
-                <a:solidFill>
-                  <a:schemeClr val="accent5"/>
-                </a:solidFill>
-              </a:rPr>
-              <a:t xml:space="preserve">Working app: scan → points → leaderboard → reward. Survey: </a:t>
-            </a:r>
-            <a:r>
-              <a:rPr lang="en-US" sz="1600" b="1">
-                <a:solidFill>
-                  <a:schemeClr val="accent1"/>
-                </a:solidFill>
-              </a:rPr>
-              <a:t>[X] of [Y]</a:t>
-            </a:r>
-            <a:r>
-              <a:rPr lang="en-US" sz="1600">
-                <a:solidFill>
-                  <a:schemeClr val="accent5"/>
-                </a:solidFill>
-              </a:rPr>
-              <a:t xml:space="preserve"> want rewards.</a:t>
-            </a:r>
-          </a:p>
-        </p:txBody>
-      </p:sp>
-      <p:sp>
-        <p:nvSpPr>
-          <p:cNvPr id="9" name="Partner card 2"/>
-          <p:cNvSpPr/>
-          <p:nvPr/>
-        </p:nvSpPr>
-        <p:spPr>
-          <a:xfrm>
-            <a:off x="4297680" y="1874520"/>
-            <a:ext cx="3566160" cy="2743200"/>
-          </a:xfrm>
-          <a:prstGeom prst="roundRect">
-            <a:avLst>
-              <a:gd name="adj" fmla="val 5000"/>
-            </a:avLst>
-          </a:prstGeom>
-          <a:solidFill>
-            <a:srgbClr val="EEF4EE"/>
-          </a:solidFill>
-          <a:ln/>
-        </p:spPr>
-        <p:txBody>
-          <a:bodyPr/>
-          <a:lstStyle/>
-          <a:p>
-            <a:endParaRPr lang="en-CH"/>
-          </a:p>
-        </p:txBody>
-      </p:sp>
-      <p:sp>
-        <p:nvSpPr>
-          <p:cNvPr id="10" name="Businesses circle"/>
-          <p:cNvSpPr/>
-          <p:nvPr/>
-        </p:nvSpPr>
-        <p:spPr>
-          <a:xfrm>
-            <a:off x="4572000" y="2103120"/>
-            <a:ext cx="777240" cy="777240"/>
-          </a:xfrm>
-          <a:prstGeom prst="ellipse">
-            <a:avLst/>
-          </a:prstGeom>
-          <a:solidFill>
-            <a:srgbClr val="23704F"/>
-          </a:solidFill>
-          <a:ln/>
-        </p:spPr>
-        <p:txBody>
-          <a:bodyPr/>
-          <a:lstStyle/>
-          <a:p>
-            <a:endParaRPr lang="en-CH"/>
-          </a:p>
-        </p:txBody>
-      </p:sp>
-      <p:pic>
-        <p:nvPicPr>
-          <p:cNvPr id="11" name="Businesses icon" descr="Businesses"/>
-          <p:cNvPicPr>
-            <a:picLocks noChangeAspect="1"/>
-          </p:cNvPicPr>
-          <p:nvPr/>
-        </p:nvPicPr>
-        <p:blipFill>
-          <a:blip r:embed="rId7"/>
-          <a:stretch>
-            <a:fillRect/>
-          </a:stretch>
-        </p:blipFill>
-        <p:spPr>
-          <a:xfrm>
-            <a:off x="4766310" y="2297430"/>
-            <a:ext cx="388620" cy="388620"/>
-          </a:xfrm>
-          <a:prstGeom prst="rect">
-            <a:avLst/>
-          </a:prstGeom>
-        </p:spPr>
-      </p:pic>
-      <p:sp>
-        <p:nvSpPr>
-          <p:cNvPr id="12" name="Businesses header"/>
-          <p:cNvSpPr txBox="1"/>
-          <p:nvPr/>
-        </p:nvSpPr>
-        <p:spPr>
-          <a:xfrm>
-            <a:off x="4572000" y="3017520"/>
-            <a:ext cx="3017520" cy="457200"/>
-          </a:xfrm>
-          <a:prstGeom prst="rect">
-            <a:avLst/>
-          </a:prstGeom>
-          <a:noFill/>
-          <a:ln/>
-        </p:spPr>
-        <p:txBody>
-          <a:bodyPr wrap="square" lIns="0" tIns="0" rIns="0" bIns="0" rtlCol="0" anchor="ctr"/>
-          <a:lstStyle/>
-          <a:p>
-            <a:pPr marL="0" indent="0">
-              <a:buNone/>
-            </a:pPr>
-            <a:r>
-              <a:rPr lang="en-US" sz="2200" b="1">
-                <a:solidFill>
-                  <a:schemeClr val="tx1"/>
-                </a:solidFill>
-              </a:rPr>
-              <a:t>Next 3 months</a:t>
-            </a:r>
-          </a:p>
-        </p:txBody>
-      </p:sp>
-      <p:sp>
-        <p:nvSpPr>
-          <p:cNvPr id="13" name="Businesses text"/>
-          <p:cNvSpPr txBox="1"/>
-          <p:nvPr/>
-        </p:nvSpPr>
-        <p:spPr>
-          <a:xfrm>
-            <a:off x="4572000" y="3520440"/>
-            <a:ext cx="3017520" cy="1005840"/>
-          </a:xfrm>
-          <a:prstGeom prst="rect">
-            <a:avLst/>
-          </a:prstGeom>
-          <a:noFill/>
-          <a:ln/>
-        </p:spPr>
-        <p:txBody>
-          <a:bodyPr wrap="square" lIns="0" tIns="0" rIns="0" bIns="0" rtlCol="0" anchor="t"/>
-          <a:lstStyle/>
-          <a:p>
-            <a:pPr marL="0" indent="0">
-              <a:buNone/>
-            </a:pPr>
-            <a:r>
-              <a:rPr lang="en-US" sz="1600">
-                <a:solidFill>
-                  <a:schemeClr val="accent5"/>
-                </a:solidFill>
-              </a:rPr>
-              <a:t>Pitch to Gemeinde Risch. QR stickers at 10 collection points. 100 pilot users.</a:t>
-            </a:r>
-          </a:p>
-        </p:txBody>
-      </p:sp>
-      <p:sp>
-        <p:nvSpPr>
-          <p:cNvPr id="14" name="Partner card 3"/>
-          <p:cNvSpPr/>
-          <p:nvPr/>
-        </p:nvSpPr>
-        <p:spPr>
-          <a:xfrm>
-            <a:off x="8046720" y="1874520"/>
-            <a:ext cx="3566160" cy="2743200"/>
-          </a:xfrm>
-          <a:prstGeom prst="roundRect">
-            <a:avLst>
-              <a:gd name="adj" fmla="val 5000"/>
-            </a:avLst>
-          </a:prstGeom>
-          <a:solidFill>
-            <a:srgbClr val="EEF4EE"/>
-          </a:solidFill>
-          <a:ln/>
-        </p:spPr>
-        <p:txBody>
-          <a:bodyPr/>
-          <a:lstStyle/>
-          <a:p>
-            <a:endParaRPr lang="en-CH"/>
-          </a:p>
-        </p:txBody>
-      </p:sp>
-      <p:sp>
-        <p:nvSpPr>
-          <p:cNvPr id="15" name="Nonprofits circle"/>
-          <p:cNvSpPr/>
-          <p:nvPr/>
-        </p:nvSpPr>
-        <p:spPr>
-          <a:xfrm>
-            <a:off x="8321040" y="2103120"/>
-            <a:ext cx="777240" cy="777240"/>
-          </a:xfrm>
-          <a:prstGeom prst="ellipse">
-            <a:avLst/>
-          </a:prstGeom>
-          <a:solidFill>
-            <a:srgbClr val="23704F"/>
-          </a:solidFill>
-          <a:ln/>
-        </p:spPr>
-        <p:txBody>
-          <a:bodyPr/>
-          <a:lstStyle/>
-          <a:p>
-            <a:endParaRPr lang="en-CH"/>
-          </a:p>
-        </p:txBody>
-      </p:sp>
-      <p:pic>
-        <p:nvPicPr>
-          <p:cNvPr id="16" name="Nonprofits icon" descr="Nonprofits"/>
-          <p:cNvPicPr>
-            <a:picLocks noChangeAspect="1"/>
-          </p:cNvPicPr>
-          <p:nvPr/>
-        </p:nvPicPr>
-        <p:blipFill>
-          <a:blip r:embed="rId8"/>
-          <a:stretch>
-            <a:fillRect/>
-          </a:stretch>
-        </p:blipFill>
-        <p:spPr>
-          <a:xfrm>
-            <a:off x="8515350" y="2297430"/>
-            <a:ext cx="388620" cy="388620"/>
-          </a:xfrm>
-          <a:prstGeom prst="rect">
-            <a:avLst/>
-          </a:prstGeom>
-        </p:spPr>
-      </p:pic>
-      <p:sp>
-        <p:nvSpPr>
-          <p:cNvPr id="17" name="Nonprofits header"/>
-          <p:cNvSpPr txBox="1"/>
-          <p:nvPr/>
-        </p:nvSpPr>
-        <p:spPr>
-          <a:xfrm>
-            <a:off x="8321040" y="3017520"/>
-            <a:ext cx="3017520" cy="457200"/>
-          </a:xfrm>
-          <a:prstGeom prst="rect">
-            <a:avLst/>
-          </a:prstGeom>
-          <a:noFill/>
-          <a:ln/>
-        </p:spPr>
-        <p:txBody>
-          <a:bodyPr wrap="square" lIns="0" tIns="0" rIns="0" bIns="0" rtlCol="0" anchor="ctr"/>
-          <a:lstStyle/>
-          <a:p>
-            <a:pPr marL="0" indent="0">
-              <a:buNone/>
-            </a:pPr>
-            <a:r>
-              <a:rPr lang="en-US" sz="2200" b="1">
-                <a:solidFill>
-                  <a:schemeClr val="tx1"/>
-                </a:solidFill>
-              </a:rPr>
-              <a:t>Next 6 months</a:t>
-            </a:r>
-          </a:p>
-        </p:txBody>
-      </p:sp>
-      <p:sp>
-        <p:nvSpPr>
-          <p:cNvPr id="18" name="Nonprofits text"/>
-          <p:cNvSpPr txBox="1"/>
-          <p:nvPr/>
-        </p:nvSpPr>
-        <p:spPr>
-          <a:xfrm>
-            <a:off x="8321040" y="3520440"/>
-            <a:ext cx="3017520" cy="1005840"/>
-          </a:xfrm>
-          <a:prstGeom prst="rect">
-            <a:avLst/>
-          </a:prstGeom>
-          <a:noFill/>
-          <a:ln/>
-        </p:spPr>
-        <p:txBody>
-          <a:bodyPr wrap="square" lIns="0" tIns="0" rIns="0" bIns="0" rtlCol="0" anchor="t"/>
-          <a:lstStyle/>
-          <a:p>
-            <a:pPr marL="0" indent="0">
-              <a:buNone/>
-            </a:pPr>
-            <a:r>
-              <a:rPr lang="en-US" sz="1600">
-                <a:solidFill>
-                  <a:schemeClr val="accent5"/>
-                </a:solidFill>
-              </a:rPr>
-              <a:t>5 local sponsors. Measure who comes back. Second town.</a:t>
-            </a:r>
-          </a:p>
-        </p:txBody>
-      </p:sp>
-      <p:sp>
-        <p:nvSpPr>
-          <p:cNvPr id="19" name="Next step strip"/>
-          <p:cNvSpPr/>
-          <p:nvPr/>
-        </p:nvSpPr>
-        <p:spPr>
-          <a:xfrm>
-            <a:off x="548640" y="4892040"/>
-            <a:ext cx="11064240" cy="868680"/>
-          </a:xfrm>
-          <a:prstGeom prst="roundRect">
-            <a:avLst>
-              <a:gd name="adj" fmla="val 15789"/>
-            </a:avLst>
-          </a:prstGeom>
-          <a:solidFill>
-            <a:srgbClr val="14342B"/>
-          </a:solidFill>
-          <a:ln/>
-        </p:spPr>
-        <p:txBody>
-          <a:bodyPr/>
-          <a:lstStyle/>
-          <a:p>
-            <a:endParaRPr lang="en-CH"/>
-          </a:p>
-        </p:txBody>
-      </p:sp>
-      <p:sp>
-        <p:nvSpPr>
-          <p:cNvPr id="20" name="Next step text"/>
-          <p:cNvSpPr txBox="1"/>
-          <p:nvPr/>
-        </p:nvSpPr>
-        <p:spPr>
-          <a:xfrm>
-            <a:off x="868680" y="4892040"/>
-            <a:ext cx="10515600" cy="868680"/>
-          </a:xfrm>
-          <a:prstGeom prst="rect">
-            <a:avLst/>
-          </a:prstGeom>
-          <a:noFill/>
-          <a:ln/>
-        </p:spPr>
-        <p:txBody>
-          <a:bodyPr wrap="square" lIns="0" tIns="0" rIns="0" bIns="0" rtlCol="0" anchor="ctr"/>
-          <a:lstStyle/>
-          <a:p>
-            <a:pPr marL="0" indent="0">
-              <a:buNone/>
-            </a:pPr>
-            <a:r>
-              <a:rPr lang="en-US" sz="2000" b="1">
-                <a:solidFill>
-                  <a:schemeClr val="accent1"/>
-                </a:solidFill>
-              </a:rPr>
-              <a:t xml:space="preserve">We need: </a:t>
-            </a:r>
-            <a:r>
-              <a:rPr lang="en-US" sz="2000">
-                <a:solidFill>
-                  <a:schemeClr val="bg1"/>
-                </a:solidFill>
-              </a:rPr>
-              <a:t>a pilot town, local reward sponsors, and your feedback.</a:t>
-            </a:r>
-          </a:p>
-        </p:txBody>
-      </p:sp>
-      <p:sp>
-        <p:nvSpPr>
-          <p:cNvPr id="25" name="Slide Number Placeholder 0"/>
-          <p:cNvSpPr>
-            <a:spLocks noGrp="1"/>
-          </p:cNvSpPr>
-          <p:nvPr>
-            <p:ph type="sldNum" sz="quarter" idx="4294967295"/>
-          </p:nvPr>
-        </p:nvSpPr>
-        <p:spPr>
-          <a:xfrm>
-            <a:off x="11155680" y="6400800"/>
-            <a:ext cx="457200" cy="274320"/>
-          </a:xfrm>
-          <a:prstGeom prst="rect">
-            <a:avLst/>
-          </a:prstGeom>
-          <a:extLst>
-            <a:ext uri="{C572A759-6A51-4108-AA02-DFA0A04FC94B}">
-              <ma14:wrappingTextBoxFlag xmlns:ma14="http://schemas.microsoft.com/office/mac/drawingml/2011/main" xmlns="" val="0"/>
-            </a:ext>
-          </a:extLst>
-        </p:spPr>
-        <p:txBody>
-          <a:bodyPr/>
-          <a:lstStyle>
-            <a:lvl1pPr>
-              <a:defRPr sz="1000">
-                <a:solidFill>
-                  <a:schemeClr val="accent5"/>
-                </a:solidFill>
-              </a:defRPr>
-            </a:lvl1pPr>
-          </a:lstStyle>
-          <a:p>
-            <a:pPr algn="r"/>
-            <a:fld id="{F7021451-1387-4CA6-816F-3879F97B5CBC}" type="slidenum">
-              <a:rPr lang="en-US" b="0"/>
-              <a:t>4</a:t>
-            </a:fld>
-            <a:endParaRPr lang="en-US"/>
-          </a:p>
-        </p:txBody>
-      </p:sp>
-    </p:spTree>
-  </p:cSld>
-  <p:clrMapOvr>
-    <a:masterClrMapping/>
-  </p:clrMapOvr>
-</p:sld>
-</file>
-
-<file path=ppt/slides/slide6.xml><?xml version="1.0" encoding="utf-8"?>
 <p:sld xmlns:a="http://schemas.openxmlformats.org/drawingml/2006/main" xmlns:r="http://schemas.openxmlformats.org/officeDocument/2006/relationships" xmlns:p="http://schemas.openxmlformats.org/presentationml/2006/main">
   <p:cSld name="Slide 6">
     <p:spTree>
@@ -5499,7 +5447,7 @@
                   <a:schemeClr val="tx1"/>
                 </a:solidFill>
               </a:rPr>
-              <a:t>Why RECYCL IT?</a:t>
+              <a:t>WHY US?</a:t>
             </a:r>
             <a:endParaRPr lang="en-US" sz="3600" dirty="0"/>
           </a:p>
@@ -5530,12 +5478,12 @@
               <a:buNone/>
             </a:pPr>
             <a:r>
-              <a:rPr lang="en-US" sz="2200" b="1">
+              <a:rPr lang="en-US" sz="2200" b="1" dirty="0">
                 <a:solidFill>
                   <a:schemeClr val="tx2"/>
                 </a:solidFill>
               </a:rPr>
-              <a:t>The only option that is free, rewarding and social.</a:t>
+              <a:t>The only option that is free, rewarding, social and forms a community.</a:t>
             </a:r>
           </a:p>
         </p:txBody>
@@ -5605,7 +5553,7 @@
           <p:nvPr/>
         </p:nvPicPr>
         <p:blipFill>
-          <a:blip r:embed="rId9"/>
+          <a:blip r:embed="rId3"/>
           <a:stretch>
             <a:fillRect/>
           </a:stretch>
@@ -5645,12 +5593,12 @@
               <a:buNone/>
             </a:pPr>
             <a:r>
-              <a:rPr lang="en-US" sz="1900">
+              <a:rPr lang="en-US" sz="1900" dirty="0">
                 <a:solidFill>
                   <a:schemeClr val="bg1"/>
                 </a:solidFill>
               </a:rPr>
-              <a:t>They make recycling possible. We make people want to do it, and we can partner with them instead of fighting them.</a:t>
+              <a:t>They make recycling possible. We make people want to do it, and we can partner with them instead of fighting them. We are fighting against waste not against each other!</a:t>
             </a:r>
           </a:p>
         </p:txBody>
@@ -5710,7 +5658,7 @@
           </a:prstGeom>
           <a:extLst>
             <a:ext uri="{C572A759-6A51-4108-AA02-DFA0A04FC94B}">
-              <ma14:wrappingTextBoxFlag xmlns:ma14="http://schemas.microsoft.com/office/mac/drawingml/2011/main" xmlns="" val="0"/>
+              <ma14:wrappingTextBoxFlag xmlns="" xmlns:ma14="http://schemas.microsoft.com/office/mac/drawingml/2011/main" val="0"/>
             </a:ext>
           </a:extLst>
         </p:spPr>
@@ -5745,39 +5693,62 @@
         </p:nvGraphicFramePr>
         <p:xfrm>
           <a:off x="548640" y="1737360"/>
-          <a:ext cx="11064239" cy="2359152"/>
+          <a:ext cx="11064239" cy="2499360"/>
         </p:xfrm>
         <a:graphic>
           <a:graphicData uri="http://schemas.openxmlformats.org/drawingml/2006/table">
             <a:tbl>
-              <a:tblPr firstRow="0" bandRow="0">
+              <a:tblPr>
                 <a:tableStyleId>{5C22544A-7EE6-4342-B048-85BDC9FD1C3A}</a:tableStyleId>
               </a:tblPr>
               <a:tblGrid>
-                <a:gridCol w="3749039"/>
-                <a:gridCol w="1828800"/>
-                <a:gridCol w="1828800"/>
-                <a:gridCol w="1828800"/>
-                <a:gridCol w="1828800"/>
+                <a:gridCol w="3749039">
+                  <a:extLst>
+                    <a:ext uri="{9D8B030D-6E8A-4147-A177-3AD203B41FA5}">
+                      <a16:colId xmlns:a16="http://schemas.microsoft.com/office/drawing/2014/main" val="20000"/>
+                    </a:ext>
+                  </a:extLst>
+                </a:gridCol>
+                <a:gridCol w="1828800">
+                  <a:extLst>
+                    <a:ext uri="{9D8B030D-6E8A-4147-A177-3AD203B41FA5}">
+                      <a16:colId xmlns:a16="http://schemas.microsoft.com/office/drawing/2014/main" val="20001"/>
+                    </a:ext>
+                  </a:extLst>
+                </a:gridCol>
+                <a:gridCol w="1828800">
+                  <a:extLst>
+                    <a:ext uri="{9D8B030D-6E8A-4147-A177-3AD203B41FA5}">
+                      <a16:colId xmlns:a16="http://schemas.microsoft.com/office/drawing/2014/main" val="20002"/>
+                    </a:ext>
+                  </a:extLst>
+                </a:gridCol>
+                <a:gridCol w="1828800">
+                  <a:extLst>
+                    <a:ext uri="{9D8B030D-6E8A-4147-A177-3AD203B41FA5}">
+                      <a16:colId xmlns:a16="http://schemas.microsoft.com/office/drawing/2014/main" val="20003"/>
+                    </a:ext>
+                  </a:extLst>
+                </a:gridCol>
+                <a:gridCol w="1828800">
+                  <a:extLst>
+                    <a:ext uri="{9D8B030D-6E8A-4147-A177-3AD203B41FA5}">
+                      <a16:colId xmlns:a16="http://schemas.microsoft.com/office/drawing/2014/main" val="20004"/>
+                    </a:ext>
+                  </a:extLst>
+                </a:gridCol>
               </a:tblGrid>
               <a:tr h="457200">
                 <a:tc>
                   <a:txBody>
-                    <a:bodyPr wrap="square"/>
+                    <a:bodyPr/>
                     <a:lstStyle/>
                     <a:p>
                       <a:pPr algn="l"/>
-                      <a:r>
-                        <a:rPr sz="1500" b="1">
-                          <a:solidFill>
-                            <a:srgbClr val="FFFFFF"/>
-                          </a:solidFill>
-                        </a:rPr>
-                        <a:t/>
-                      </a:r>
+                      <a:endParaRPr/>
                     </a:p>
                   </a:txBody>
-                  <a:tcPr anchor="ctr" marL="182880" marR="91440" marT="27432" marB="27432">
+                  <a:tcPr marL="182880" marT="27432" marB="27432" anchor="ctr">
                     <a:solidFill>
                       <a:srgbClr val="14342B"/>
                     </a:solidFill>
@@ -5785,7 +5756,7 @@
                 </a:tc>
                 <a:tc>
                   <a:txBody>
-                    <a:bodyPr wrap="square"/>
+                    <a:bodyPr/>
                     <a:lstStyle/>
                     <a:p>
                       <a:pPr algn="ctr"/>
@@ -5799,7 +5770,7 @@
                       </a:r>
                     </a:p>
                   </a:txBody>
-                  <a:tcPr anchor="ctr" marL="182880" marR="91440" marT="27432" marB="27432">
+                  <a:tcPr marL="182880" marT="27432" marB="27432" anchor="ctr">
                     <a:solidFill>
                       <a:srgbClr val="14342B"/>
                     </a:solidFill>
@@ -5807,7 +5778,7 @@
                 </a:tc>
                 <a:tc>
                   <a:txBody>
-                    <a:bodyPr wrap="square"/>
+                    <a:bodyPr/>
                     <a:lstStyle/>
                     <a:p>
                       <a:pPr algn="ctr"/>
@@ -5821,7 +5792,7 @@
                       </a:r>
                     </a:p>
                   </a:txBody>
-                  <a:tcPr anchor="ctr" marL="182880" marR="91440" marT="27432" marB="27432">
+                  <a:tcPr marL="182880" marT="27432" marB="27432" anchor="ctr">
                     <a:solidFill>
                       <a:srgbClr val="14342B"/>
                     </a:solidFill>
@@ -5829,7 +5800,7 @@
                 </a:tc>
                 <a:tc>
                   <a:txBody>
-                    <a:bodyPr wrap="square"/>
+                    <a:bodyPr/>
                     <a:lstStyle/>
                     <a:p>
                       <a:pPr algn="ctr"/>
@@ -5843,7 +5814,7 @@
                       </a:r>
                     </a:p>
                   </a:txBody>
-                  <a:tcPr anchor="ctr" marL="182880" marR="91440" marT="27432" marB="27432">
+                  <a:tcPr marL="182880" marT="27432" marB="27432" anchor="ctr">
                     <a:solidFill>
                       <a:srgbClr val="14342B"/>
                     </a:solidFill>
@@ -5851,7 +5822,7 @@
                 </a:tc>
                 <a:tc>
                   <a:txBody>
-                    <a:bodyPr wrap="square"/>
+                    <a:bodyPr/>
                     <a:lstStyle/>
                     <a:p>
                       <a:pPr algn="ctr"/>
@@ -5865,17 +5836,22 @@
                       </a:r>
                     </a:p>
                   </a:txBody>
-                  <a:tcPr anchor="ctr" marL="182880" marR="91440" marT="27432" marB="27432">
+                  <a:tcPr marL="182880" marT="27432" marB="27432" anchor="ctr">
                     <a:solidFill>
                       <a:srgbClr val="14342B"/>
                     </a:solidFill>
                   </a:tcPr>
                 </a:tc>
+                <a:extLst>
+                  <a:ext uri="{0D108BD9-81ED-4DB2-BD59-A6C34878D82A}">
+                    <a16:rowId xmlns:a16="http://schemas.microsoft.com/office/drawing/2014/main" val="10000"/>
+                  </a:ext>
+                </a:extLst>
               </a:tr>
               <a:tr h="475488">
                 <a:tc>
                   <a:txBody>
-                    <a:bodyPr wrap="square"/>
+                    <a:bodyPr/>
                     <a:lstStyle/>
                     <a:p>
                       <a:pPr algn="l"/>
@@ -5900,7 +5876,7 @@
                       </a:r>
                     </a:p>
                   </a:txBody>
-                  <a:tcPr anchor="ctr" marL="182880" marR="91440" marT="27432" marB="27432">
+                  <a:tcPr marL="182880" marT="27432" marB="27432" anchor="ctr">
                     <a:solidFill>
                       <a:srgbClr val="FDE8C8"/>
                     </a:solidFill>
@@ -5908,7 +5884,7 @@
                 </a:tc>
                 <a:tc>
                   <a:txBody>
-                    <a:bodyPr wrap="square"/>
+                    <a:bodyPr/>
                     <a:lstStyle/>
                     <a:p>
                       <a:pPr algn="ctr"/>
@@ -5922,7 +5898,7 @@
                       </a:r>
                     </a:p>
                   </a:txBody>
-                  <a:tcPr anchor="ctr" marL="182880" marR="91440" marT="27432" marB="27432">
+                  <a:tcPr marL="182880" marT="27432" marB="27432" anchor="ctr">
                     <a:solidFill>
                       <a:srgbClr val="FDE8C8"/>
                     </a:solidFill>
@@ -5930,7 +5906,7 @@
                 </a:tc>
                 <a:tc>
                   <a:txBody>
-                    <a:bodyPr wrap="square"/>
+                    <a:bodyPr/>
                     <a:lstStyle/>
                     <a:p>
                       <a:pPr algn="ctr"/>
@@ -5944,7 +5920,7 @@
                       </a:r>
                     </a:p>
                   </a:txBody>
-                  <a:tcPr anchor="ctr" marL="182880" marR="91440" marT="27432" marB="27432">
+                  <a:tcPr marL="182880" marT="27432" marB="27432" anchor="ctr">
                     <a:solidFill>
                       <a:srgbClr val="FDE8C8"/>
                     </a:solidFill>
@@ -5952,7 +5928,7 @@
                 </a:tc>
                 <a:tc>
                   <a:txBody>
-                    <a:bodyPr wrap="square"/>
+                    <a:bodyPr/>
                     <a:lstStyle/>
                     <a:p>
                       <a:pPr algn="ctr"/>
@@ -5966,7 +5942,7 @@
                       </a:r>
                     </a:p>
                   </a:txBody>
-                  <a:tcPr anchor="ctr" marL="182880" marR="91440" marT="27432" marB="27432">
+                  <a:tcPr marL="182880" marT="27432" marB="27432" anchor="ctr">
                     <a:solidFill>
                       <a:srgbClr val="FDE8C8"/>
                     </a:solidFill>
@@ -5974,7 +5950,7 @@
                 </a:tc>
                 <a:tc>
                   <a:txBody>
-                    <a:bodyPr wrap="square"/>
+                    <a:bodyPr/>
                     <a:lstStyle/>
                     <a:p>
                       <a:pPr algn="ctr"/>
@@ -5988,17 +5964,22 @@
                       </a:r>
                     </a:p>
                   </a:txBody>
-                  <a:tcPr anchor="ctr" marL="182880" marR="91440" marT="27432" marB="27432">
+                  <a:tcPr marL="182880" marT="27432" marB="27432" anchor="ctr">
                     <a:solidFill>
                       <a:srgbClr val="FDE8C8"/>
                     </a:solidFill>
                   </a:tcPr>
                 </a:tc>
+                <a:extLst>
+                  <a:ext uri="{0D108BD9-81ED-4DB2-BD59-A6C34878D82A}">
+                    <a16:rowId xmlns:a16="http://schemas.microsoft.com/office/drawing/2014/main" val="10001"/>
+                  </a:ext>
+                </a:extLst>
               </a:tr>
               <a:tr h="475488">
                 <a:tc>
                   <a:txBody>
-                    <a:bodyPr wrap="square"/>
+                    <a:bodyPr/>
                     <a:lstStyle/>
                     <a:p>
                       <a:pPr algn="l"/>
@@ -6023,7 +6004,7 @@
                       </a:r>
                     </a:p>
                   </a:txBody>
-                  <a:tcPr anchor="ctr" marL="182880" marR="91440" marT="27432" marB="27432">
+                  <a:tcPr marL="182880" marT="27432" marB="27432" anchor="ctr">
                     <a:solidFill>
                       <a:srgbClr val="EEF4EE"/>
                     </a:solidFill>
@@ -6031,7 +6012,7 @@
                 </a:tc>
                 <a:tc>
                   <a:txBody>
-                    <a:bodyPr wrap="square"/>
+                    <a:bodyPr/>
                     <a:lstStyle/>
                     <a:p>
                       <a:pPr algn="ctr"/>
@@ -6045,7 +6026,7 @@
                       </a:r>
                     </a:p>
                   </a:txBody>
-                  <a:tcPr anchor="ctr" marL="182880" marR="91440" marT="27432" marB="27432">
+                  <a:tcPr marL="182880" marT="27432" marB="27432" anchor="ctr">
                     <a:solidFill>
                       <a:srgbClr val="EEF4EE"/>
                     </a:solidFill>
@@ -6053,7 +6034,7 @@
                 </a:tc>
                 <a:tc>
                   <a:txBody>
-                    <a:bodyPr wrap="square"/>
+                    <a:bodyPr/>
                     <a:lstStyle/>
                     <a:p>
                       <a:pPr algn="ctr"/>
@@ -6067,7 +6048,7 @@
                       </a:r>
                     </a:p>
                   </a:txBody>
-                  <a:tcPr anchor="ctr" marL="182880" marR="91440" marT="27432" marB="27432">
+                  <a:tcPr marL="182880" marT="27432" marB="27432" anchor="ctr">
                     <a:solidFill>
                       <a:srgbClr val="EEF4EE"/>
                     </a:solidFill>
@@ -6075,7 +6056,7 @@
                 </a:tc>
                 <a:tc>
                   <a:txBody>
-                    <a:bodyPr wrap="square"/>
+                    <a:bodyPr/>
                     <a:lstStyle/>
                     <a:p>
                       <a:pPr algn="ctr"/>
@@ -6089,7 +6070,7 @@
                       </a:r>
                     </a:p>
                   </a:txBody>
-                  <a:tcPr anchor="ctr" marL="182880" marR="91440" marT="27432" marB="27432">
+                  <a:tcPr marL="182880" marT="27432" marB="27432" anchor="ctr">
                     <a:solidFill>
                       <a:srgbClr val="EEF4EE"/>
                     </a:solidFill>
@@ -6097,7 +6078,7 @@
                 </a:tc>
                 <a:tc>
                   <a:txBody>
-                    <a:bodyPr wrap="square"/>
+                    <a:bodyPr/>
                     <a:lstStyle/>
                     <a:p>
                       <a:pPr algn="ctr"/>
@@ -6111,17 +6092,22 @@
                       </a:r>
                     </a:p>
                   </a:txBody>
-                  <a:tcPr anchor="ctr" marL="182880" marR="91440" marT="27432" marB="27432">
+                  <a:tcPr marL="182880" marT="27432" marB="27432" anchor="ctr">
                     <a:solidFill>
                       <a:srgbClr val="EEF4EE"/>
                     </a:solidFill>
                   </a:tcPr>
                 </a:tc>
+                <a:extLst>
+                  <a:ext uri="{0D108BD9-81ED-4DB2-BD59-A6C34878D82A}">
+                    <a16:rowId xmlns:a16="http://schemas.microsoft.com/office/drawing/2014/main" val="10002"/>
+                  </a:ext>
+                </a:extLst>
               </a:tr>
               <a:tr h="475488">
                 <a:tc>
                   <a:txBody>
-                    <a:bodyPr wrap="square"/>
+                    <a:bodyPr/>
                     <a:lstStyle/>
                     <a:p>
                       <a:pPr algn="l"/>
@@ -6146,7 +6132,7 @@
                       </a:r>
                     </a:p>
                   </a:txBody>
-                  <a:tcPr anchor="ctr" marL="182880" marR="91440" marT="27432" marB="27432">
+                  <a:tcPr marL="182880" marT="27432" marB="27432" anchor="ctr">
                     <a:solidFill>
                       <a:srgbClr val="FFFFFF"/>
                     </a:solidFill>
@@ -6154,7 +6140,7 @@
                 </a:tc>
                 <a:tc>
                   <a:txBody>
-                    <a:bodyPr wrap="square"/>
+                    <a:bodyPr/>
                     <a:lstStyle/>
                     <a:p>
                       <a:pPr algn="ctr"/>
@@ -6168,7 +6154,7 @@
                       </a:r>
                     </a:p>
                   </a:txBody>
-                  <a:tcPr anchor="ctr" marL="182880" marR="91440" marT="27432" marB="27432">
+                  <a:tcPr marL="182880" marT="27432" marB="27432" anchor="ctr">
                     <a:solidFill>
                       <a:srgbClr val="FFFFFF"/>
                     </a:solidFill>
@@ -6176,7 +6162,7 @@
                 </a:tc>
                 <a:tc>
                   <a:txBody>
-                    <a:bodyPr wrap="square"/>
+                    <a:bodyPr/>
                     <a:lstStyle/>
                     <a:p>
                       <a:pPr algn="ctr"/>
@@ -6190,7 +6176,7 @@
                       </a:r>
                     </a:p>
                   </a:txBody>
-                  <a:tcPr anchor="ctr" marL="182880" marR="91440" marT="27432" marB="27432">
+                  <a:tcPr marL="182880" marT="27432" marB="27432" anchor="ctr">
                     <a:solidFill>
                       <a:srgbClr val="FFFFFF"/>
                     </a:solidFill>
@@ -6198,7 +6184,7 @@
                 </a:tc>
                 <a:tc>
                   <a:txBody>
-                    <a:bodyPr wrap="square"/>
+                    <a:bodyPr/>
                     <a:lstStyle/>
                     <a:p>
                       <a:pPr algn="ctr"/>
@@ -6212,7 +6198,7 @@
                       </a:r>
                     </a:p>
                   </a:txBody>
-                  <a:tcPr anchor="ctr" marL="182880" marR="91440" marT="27432" marB="27432">
+                  <a:tcPr marL="182880" marT="27432" marB="27432" anchor="ctr">
                     <a:solidFill>
                       <a:srgbClr val="FFFFFF"/>
                     </a:solidFill>
@@ -6220,7 +6206,7 @@
                 </a:tc>
                 <a:tc>
                   <a:txBody>
-                    <a:bodyPr wrap="square"/>
+                    <a:bodyPr/>
                     <a:lstStyle/>
                     <a:p>
                       <a:pPr algn="ctr"/>
@@ -6234,17 +6220,22 @@
                       </a:r>
                     </a:p>
                   </a:txBody>
-                  <a:tcPr anchor="ctr" marL="182880" marR="91440" marT="27432" marB="27432">
+                  <a:tcPr marL="182880" marT="27432" marB="27432" anchor="ctr">
                     <a:solidFill>
                       <a:srgbClr val="FFFFFF"/>
                     </a:solidFill>
                   </a:tcPr>
                 </a:tc>
+                <a:extLst>
+                  <a:ext uri="{0D108BD9-81ED-4DB2-BD59-A6C34878D82A}">
+                    <a16:rowId xmlns:a16="http://schemas.microsoft.com/office/drawing/2014/main" val="10003"/>
+                  </a:ext>
+                </a:extLst>
               </a:tr>
               <a:tr h="475488">
                 <a:tc>
                   <a:txBody>
-                    <a:bodyPr wrap="square"/>
+                    <a:bodyPr/>
                     <a:lstStyle/>
                     <a:p>
                       <a:pPr algn="l"/>
@@ -6269,7 +6260,7 @@
                       </a:r>
                     </a:p>
                   </a:txBody>
-                  <a:tcPr anchor="ctr" marL="182880" marR="91440" marT="27432" marB="27432">
+                  <a:tcPr marL="182880" marT="27432" marB="27432" anchor="ctr">
                     <a:solidFill>
                       <a:srgbClr val="EEF4EE"/>
                     </a:solidFill>
@@ -6277,7 +6268,7 @@
                 </a:tc>
                 <a:tc>
                   <a:txBody>
-                    <a:bodyPr wrap="square"/>
+                    <a:bodyPr/>
                     <a:lstStyle/>
                     <a:p>
                       <a:pPr algn="ctr"/>
@@ -6291,7 +6282,7 @@
                       </a:r>
                     </a:p>
                   </a:txBody>
-                  <a:tcPr anchor="ctr" marL="182880" marR="91440" marT="27432" marB="27432">
+                  <a:tcPr marL="182880" marT="27432" marB="27432" anchor="ctr">
                     <a:solidFill>
                       <a:srgbClr val="EEF4EE"/>
                     </a:solidFill>
@@ -6299,7 +6290,7 @@
                 </a:tc>
                 <a:tc>
                   <a:txBody>
-                    <a:bodyPr wrap="square"/>
+                    <a:bodyPr/>
                     <a:lstStyle/>
                     <a:p>
                       <a:pPr algn="ctr"/>
@@ -6313,7 +6304,7 @@
                       </a:r>
                     </a:p>
                   </a:txBody>
-                  <a:tcPr anchor="ctr" marL="182880" marR="91440" marT="27432" marB="27432">
+                  <a:tcPr marL="182880" marT="27432" marB="27432" anchor="ctr">
                     <a:solidFill>
                       <a:srgbClr val="EEF4EE"/>
                     </a:solidFill>
@@ -6321,7 +6312,7 @@
                 </a:tc>
                 <a:tc>
                   <a:txBody>
-                    <a:bodyPr wrap="square"/>
+                    <a:bodyPr/>
                     <a:lstStyle/>
                     <a:p>
                       <a:pPr algn="ctr"/>
@@ -6335,7 +6326,7 @@
                       </a:r>
                     </a:p>
                   </a:txBody>
-                  <a:tcPr anchor="ctr" marL="182880" marR="91440" marT="27432" marB="27432">
+                  <a:tcPr marL="182880" marT="27432" marB="27432" anchor="ctr">
                     <a:solidFill>
                       <a:srgbClr val="EEF4EE"/>
                     </a:solidFill>
@@ -6343,7 +6334,7 @@
                 </a:tc>
                 <a:tc>
                   <a:txBody>
-                    <a:bodyPr wrap="square"/>
+                    <a:bodyPr/>
                     <a:lstStyle/>
                     <a:p>
                       <a:pPr algn="ctr"/>
@@ -6357,12 +6348,17 @@
                       </a:r>
                     </a:p>
                   </a:txBody>
-                  <a:tcPr anchor="ctr" marL="182880" marR="91440" marT="27432" marB="27432">
+                  <a:tcPr marL="182880" marT="27432" marB="27432" anchor="ctr">
                     <a:solidFill>
                       <a:srgbClr val="EEF4EE"/>
                     </a:solidFill>
                   </a:tcPr>
                 </a:tc>
+                <a:extLst>
+                  <a:ext uri="{0D108BD9-81ED-4DB2-BD59-A6C34878D82A}">
+                    <a16:rowId xmlns:a16="http://schemas.microsoft.com/office/drawing/2014/main" val="10004"/>
+                  </a:ext>
+                </a:extLst>
               </a:tr>
             </a:tbl>
           </a:graphicData>
@@ -6376,7 +6372,7 @@
 </p:sld>
 </file>
 
-<file path=ppt/slides/slide7.xml><?xml version="1.0" encoding="utf-8"?>
+<file path=ppt/slides/slide6.xml><?xml version="1.0" encoding="utf-8"?>
 <p:sld xmlns:a="http://schemas.openxmlformats.org/drawingml/2006/main" xmlns:r="http://schemas.openxmlformats.org/officeDocument/2006/relationships" xmlns:p="http://schemas.openxmlformats.org/presentationml/2006/main">
   <p:cSld name="Slide 8">
     <p:spTree>
@@ -7333,7 +7329,7 @@
                   <a:schemeClr val="accent1"/>
                 </a:solidFill>
               </a:rPr>
-              <a:t xml:space="preserve">Channels: </a:t>
+              <a:t>Channels: </a:t>
             </a:r>
             <a:r>
               <a:rPr lang="en-CH" sz="1900">
@@ -7366,7 +7362,7 @@
           </a:prstGeom>
           <a:extLst>
             <a:ext uri="{C572A759-6A51-4108-AA02-DFA0A04FC94B}">
-              <ma14:wrappingTextBoxFlag xmlns:ma14="http://schemas.microsoft.com/office/mac/drawingml/2011/main" xmlns="" val="0"/>
+              <ma14:wrappingTextBoxFlag xmlns="" xmlns:ma14="http://schemas.microsoft.com/office/mac/drawingml/2011/main" val="0"/>
             </a:ext>
           </a:extLst>
         </p:spPr>
@@ -7399,9 +7395,9 @@
 </p:sld>
 </file>
 
-<file path=ppt/slides/slide8.xml><?xml version="1.0" encoding="utf-8"?>
+<file path=ppt/slides/slide7.xml><?xml version="1.0" encoding="utf-8"?>
 <p:sld xmlns:a="http://schemas.openxmlformats.org/drawingml/2006/main" xmlns:r="http://schemas.openxmlformats.org/officeDocument/2006/relationships" xmlns:p="http://schemas.openxmlformats.org/presentationml/2006/main">
-  <p:cSld name="Slide 7">
+  <p:cSld name="Slide 4">
     <p:spTree>
       <p:nvGrpSpPr>
         <p:cNvPr id="1" name=""/>
@@ -7450,25 +7446,60 @@
                   <a:schemeClr val="tx1"/>
                 </a:solidFill>
               </a:rPr>
-              <a:t>Backup: Risks &amp; Our Answers</a:t>
-            </a:r>
-          </a:p>
-        </p:txBody>
-      </p:sp>
-      <p:sp>
-        <p:nvSpPr>
-          <p:cNvPr id="3" name="Risk row 1"/>
+              <a:t>Progress &amp; Next Steps</a:t>
+            </a:r>
+          </a:p>
+        </p:txBody>
+      </p:sp>
+      <p:sp>
+        <p:nvSpPr>
+          <p:cNvPr id="3" name="Subtitle"/>
+          <p:cNvSpPr txBox="1"/>
+          <p:nvPr/>
+        </p:nvSpPr>
+        <p:spPr>
+          <a:xfrm>
+            <a:off x="548640" y="1143000"/>
+            <a:ext cx="11064240" cy="457200"/>
+          </a:xfrm>
+          <a:prstGeom prst="rect">
+            <a:avLst/>
+          </a:prstGeom>
+          <a:noFill/>
+          <a:ln/>
+        </p:spPr>
+        <p:txBody>
+          <a:bodyPr wrap="square" lIns="0" tIns="0" rIns="0" bIns="0" rtlCol="0" anchor="ctr"/>
+          <a:lstStyle/>
+          <a:p>
+            <a:pPr marL="0" indent="0">
+              <a:buNone/>
+            </a:pPr>
+            <a:r>
+              <a:rPr lang="en-US" sz="2200" b="1">
+                <a:solidFill>
+                  <a:schemeClr val="tx2"/>
+                </a:solidFill>
+              </a:rPr>
+              <a:t>Built in 24 hours. Ready for a pilot in Rotkreuz.</a:t>
+            </a:r>
+          </a:p>
+        </p:txBody>
+      </p:sp>
+      <p:sp>
+        <p:nvSpPr>
+          <p:cNvPr id="4" name="Partner card 1"/>
           <p:cNvSpPr/>
           <p:nvPr/>
         </p:nvSpPr>
         <p:spPr>
           <a:xfrm>
-            <a:off x="548640" y="1325880"/>
-            <a:ext cx="11064240" cy="777240"/>
+            <a:off x="548640" y="1874520"/>
+            <a:ext cx="3566160" cy="2743200"/>
           </a:xfrm>
           <a:prstGeom prst="roundRect">
             <a:avLst>
-              <a:gd name="adj" fmla="val 17647"/>
+              <a:gd name="adj" fmla="val 5000"/>
             </a:avLst>
           </a:prstGeom>
           <a:solidFill>
@@ -7486,20 +7517,20 @@
       </p:sp>
       <p:sp>
         <p:nvSpPr>
-          <p:cNvPr id="4" name="Risk 1 circle"/>
+          <p:cNvPr id="5" name="Municipalities circle"/>
           <p:cNvSpPr/>
           <p:nvPr/>
         </p:nvSpPr>
         <p:spPr>
           <a:xfrm>
-            <a:off x="731520" y="1417320"/>
-            <a:ext cx="594360" cy="594360"/>
+            <a:off x="822960" y="2103120"/>
+            <a:ext cx="777240" cy="777240"/>
           </a:xfrm>
           <a:prstGeom prst="ellipse">
             <a:avLst/>
           </a:prstGeom>
           <a:solidFill>
-            <a:srgbClr val="F2A33A"/>
+            <a:srgbClr val="23704F"/>
           </a:solidFill>
           <a:ln/>
         </p:spPr>
@@ -7513,7 +7544,7 @@
       </p:sp>
       <p:pic>
         <p:nvPicPr>
-          <p:cNvPr id="5" name="Risk 1 icon" descr="Risk 1"/>
+          <p:cNvPr id="6" name="Municipalities icon" descr="Municipalities"/>
           <p:cNvPicPr>
             <a:picLocks noChangeAspect="1"/>
           </p:cNvPicPr>
@@ -7527,8 +7558,8 @@
         </p:blipFill>
         <p:spPr>
           <a:xfrm>
-            <a:off x="880110" y="1565910"/>
-            <a:ext cx="297180" cy="297180"/>
+            <a:off x="1017270" y="2297430"/>
+            <a:ext cx="388620" cy="388620"/>
           </a:xfrm>
           <a:prstGeom prst="rect">
             <a:avLst/>
@@ -7537,14 +7568,14 @@
       </p:pic>
       <p:sp>
         <p:nvSpPr>
-          <p:cNvPr id="6" name="Risk 1"/>
+          <p:cNvPr id="7" name="Municipalities header"/>
           <p:cNvSpPr txBox="1"/>
           <p:nvPr/>
         </p:nvSpPr>
         <p:spPr>
           <a:xfrm>
-            <a:off x="1554480" y="1325880"/>
-            <a:ext cx="3383280" cy="777240"/>
+            <a:off x="822960" y="3017520"/>
+            <a:ext cx="3017520" cy="457200"/>
           </a:xfrm>
           <a:prstGeom prst="rect">
             <a:avLst/>
@@ -7560,27 +7591,26 @@
               <a:buNone/>
             </a:pPr>
             <a:r>
-              <a:rPr lang="en-US" sz="1700" b="1" dirty="0">
+              <a:rPr lang="en-US" sz="2200" b="1">
                 <a:solidFill>
                   <a:schemeClr val="tx1"/>
                 </a:solidFill>
               </a:rPr>
-              <a:t>Funding depends on partners</a:t>
-            </a:r>
-            <a:endParaRPr lang="en-US" sz="1700" dirty="0"/>
-          </a:p>
-        </p:txBody>
-      </p:sp>
-      <p:sp>
-        <p:nvSpPr>
-          <p:cNvPr id="7" name="Answer 1"/>
+              <a:t>Today</a:t>
+            </a:r>
+          </a:p>
+        </p:txBody>
+      </p:sp>
+      <p:sp>
+        <p:nvSpPr>
+          <p:cNvPr id="8" name="Municipalities text"/>
           <p:cNvSpPr txBox="1"/>
           <p:nvPr/>
         </p:nvSpPr>
         <p:spPr>
           <a:xfrm>
-            <a:off x="5029200" y="1325880"/>
-            <a:ext cx="6400800" cy="777240"/>
+            <a:off x="822960" y="3520440"/>
+            <a:ext cx="3017520" cy="1005840"/>
           </a:xfrm>
           <a:prstGeom prst="rect">
             <a:avLst/>
@@ -7589,41 +7619,57 @@
           <a:ln/>
         </p:spPr>
         <p:txBody>
-          <a:bodyPr wrap="square" lIns="0" tIns="0" rIns="0" bIns="0" rtlCol="0" anchor="ctr"/>
+          <a:bodyPr wrap="square" lIns="0" tIns="0" rIns="0" bIns="0" rtlCol="0" anchor="t"/>
           <a:lstStyle/>
           <a:p>
             <a:pPr marL="0" indent="0">
               <a:buNone/>
             </a:pPr>
             <a:r>
-              <a:rPr lang="en-US" sz="1600">
+              <a:rPr lang="en-US" sz="1600" dirty="0">
                 <a:solidFill>
                   <a:schemeClr val="accent5"/>
                 </a:solidFill>
               </a:rPr>
-              <a:t>Three income sources; from year 2, six partner towns cover running costs</a:t>
-            </a:r>
-          </a:p>
-        </p:txBody>
-      </p:sp>
-      <p:sp>
-        <p:nvSpPr>
-          <p:cNvPr id="8" name="Risk row 2"/>
+              <a:t>Working app: scan → points → leaderboard → reward. Survey: </a:t>
+            </a:r>
+            <a:r>
+              <a:rPr lang="en-US" sz="1600" b="1" dirty="0">
+                <a:solidFill>
+                  <a:schemeClr val="accent1"/>
+                </a:solidFill>
+              </a:rPr>
+              <a:t>[X] of [Y]</a:t>
+            </a:r>
+            <a:r>
+              <a:rPr lang="en-US" sz="1600" dirty="0">
+                <a:solidFill>
+                  <a:schemeClr val="accent5"/>
+                </a:solidFill>
+              </a:rPr>
+              <a:t> want rewards.</a:t>
+            </a:r>
+          </a:p>
+        </p:txBody>
+      </p:sp>
+      <p:sp>
+        <p:nvSpPr>
+          <p:cNvPr id="9" name="Partner card 2"/>
           <p:cNvSpPr/>
           <p:nvPr/>
         </p:nvSpPr>
         <p:spPr>
           <a:xfrm>
-            <a:off x="548640" y="2240280"/>
-            <a:ext cx="11064240" cy="777240"/>
+            <a:off x="4297680" y="1874520"/>
+            <a:ext cx="3566160" cy="2743200"/>
           </a:xfrm>
           <a:prstGeom prst="roundRect">
             <a:avLst>
-              <a:gd name="adj" fmla="val 17647"/>
+              <a:gd name="adj" fmla="val 5000"/>
             </a:avLst>
           </a:prstGeom>
           <a:solidFill>
-            <a:srgbClr val="FFFFFF"/>
+            <a:srgbClr val="EEF4EE"/>
           </a:solidFill>
           <a:ln/>
         </p:spPr>
@@ -7637,20 +7683,20 @@
       </p:sp>
       <p:sp>
         <p:nvSpPr>
-          <p:cNvPr id="9" name="Risk 2 circle"/>
+          <p:cNvPr id="10" name="Businesses circle"/>
           <p:cNvSpPr/>
           <p:nvPr/>
         </p:nvSpPr>
         <p:spPr>
           <a:xfrm>
-            <a:off x="731520" y="2331720"/>
-            <a:ext cx="594360" cy="594360"/>
+            <a:off x="4572000" y="2103120"/>
+            <a:ext cx="777240" cy="777240"/>
           </a:xfrm>
           <a:prstGeom prst="ellipse">
             <a:avLst/>
           </a:prstGeom>
           <a:solidFill>
-            <a:srgbClr val="F2A33A"/>
+            <a:srgbClr val="23704F"/>
           </a:solidFill>
           <a:ln/>
         </p:spPr>
@@ -7664,7 +7710,7 @@
       </p:sp>
       <p:pic>
         <p:nvPicPr>
-          <p:cNvPr id="10" name="Risk 2 icon" descr="Risk 2"/>
+          <p:cNvPr id="11" name="Businesses icon" descr="Businesses"/>
           <p:cNvPicPr>
             <a:picLocks noChangeAspect="1"/>
           </p:cNvPicPr>
@@ -7678,8 +7724,8 @@
         </p:blipFill>
         <p:spPr>
           <a:xfrm>
-            <a:off x="880110" y="2480310"/>
-            <a:ext cx="297180" cy="297180"/>
+            <a:off x="4766310" y="2297430"/>
+            <a:ext cx="388620" cy="388620"/>
           </a:xfrm>
           <a:prstGeom prst="rect">
             <a:avLst/>
@@ -7688,14 +7734,14 @@
       </p:pic>
       <p:sp>
         <p:nvSpPr>
-          <p:cNvPr id="11" name="Risk 2"/>
+          <p:cNvPr id="12" name="Businesses header"/>
           <p:cNvSpPr txBox="1"/>
           <p:nvPr/>
         </p:nvSpPr>
         <p:spPr>
           <a:xfrm>
-            <a:off x="1554480" y="2240280"/>
-            <a:ext cx="3383280" cy="777240"/>
+            <a:off x="4572000" y="3017520"/>
+            <a:ext cx="3017520" cy="457200"/>
           </a:xfrm>
           <a:prstGeom prst="rect">
             <a:avLst/>
@@ -7711,27 +7757,26 @@
               <a:buNone/>
             </a:pPr>
             <a:r>
-              <a:rPr lang="en-US" sz="1700" b="1" dirty="0">
+              <a:rPr lang="en-US" sz="2200" b="1">
                 <a:solidFill>
                   <a:schemeClr val="tx1"/>
                 </a:solidFill>
               </a:rPr>
-              <a:t>People cheat for points</a:t>
-            </a:r>
-            <a:endParaRPr lang="en-US" sz="1700" dirty="0"/>
-          </a:p>
-        </p:txBody>
-      </p:sp>
-      <p:sp>
-        <p:nvSpPr>
-          <p:cNvPr id="12" name="Answer 2"/>
+              <a:t>Next 3 months</a:t>
+            </a:r>
+          </a:p>
+        </p:txBody>
+      </p:sp>
+      <p:sp>
+        <p:nvSpPr>
+          <p:cNvPr id="13" name="Businesses text"/>
           <p:cNvSpPr txBox="1"/>
           <p:nvPr/>
         </p:nvSpPr>
         <p:spPr>
           <a:xfrm>
-            <a:off x="5029200" y="2240280"/>
-            <a:ext cx="6400800" cy="777240"/>
+            <a:off x="4572000" y="3520440"/>
+            <a:ext cx="3017520" cy="1005840"/>
           </a:xfrm>
           <a:prstGeom prst="rect">
             <a:avLst/>
@@ -7740,7 +7785,7 @@
           <a:ln/>
         </p:spPr>
         <p:txBody>
-          <a:bodyPr wrap="square" lIns="0" tIns="0" rIns="0" bIns="0" rtlCol="0" anchor="ctr"/>
+          <a:bodyPr wrap="square" lIns="0" tIns="0" rIns="0" bIns="0" rtlCol="0" anchor="t"/>
           <a:lstStyle/>
           <a:p>
             <a:pPr marL="0" indent="0">
@@ -7752,25 +7797,25 @@
                   <a:schemeClr val="accent5"/>
                 </a:solidFill>
               </a:rPr>
-              <a:t>QR check-in at real collection points, daily point caps, manual review first</a:t>
-            </a:r>
-          </a:p>
-        </p:txBody>
-      </p:sp>
-      <p:sp>
-        <p:nvSpPr>
-          <p:cNvPr id="13" name="Risk row 3"/>
+              <a:t>Pitch to Gemeinde Risch. QR stickers at 10 collection points. 100 pilot users.</a:t>
+            </a:r>
+          </a:p>
+        </p:txBody>
+      </p:sp>
+      <p:sp>
+        <p:nvSpPr>
+          <p:cNvPr id="14" name="Partner card 3"/>
           <p:cNvSpPr/>
           <p:nvPr/>
         </p:nvSpPr>
         <p:spPr>
           <a:xfrm>
-            <a:off x="548640" y="3154680"/>
-            <a:ext cx="11064240" cy="777240"/>
+            <a:off x="8046720" y="1874520"/>
+            <a:ext cx="3566160" cy="2743200"/>
           </a:xfrm>
           <a:prstGeom prst="roundRect">
             <a:avLst>
-              <a:gd name="adj" fmla="val 17647"/>
+              <a:gd name="adj" fmla="val 5000"/>
             </a:avLst>
           </a:prstGeom>
           <a:solidFill>
@@ -7788,20 +7833,20 @@
       </p:sp>
       <p:sp>
         <p:nvSpPr>
-          <p:cNvPr id="14" name="Risk 3 circle"/>
+          <p:cNvPr id="15" name="Nonprofits circle"/>
           <p:cNvSpPr/>
           <p:nvPr/>
         </p:nvSpPr>
         <p:spPr>
           <a:xfrm>
-            <a:off x="731520" y="3246120"/>
-            <a:ext cx="594360" cy="594360"/>
+            <a:off x="8321040" y="2103120"/>
+            <a:ext cx="777240" cy="777240"/>
           </a:xfrm>
           <a:prstGeom prst="ellipse">
             <a:avLst/>
           </a:prstGeom>
           <a:solidFill>
-            <a:srgbClr val="F2A33A"/>
+            <a:srgbClr val="23704F"/>
           </a:solidFill>
           <a:ln/>
         </p:spPr>
@@ -7815,7 +7860,7 @@
       </p:sp>
       <p:pic>
         <p:nvPicPr>
-          <p:cNvPr id="15" name="Risk 3 icon" descr="Risk 3"/>
+          <p:cNvPr id="16" name="Nonprofits icon" descr="Nonprofits"/>
           <p:cNvPicPr>
             <a:picLocks noChangeAspect="1"/>
           </p:cNvPicPr>
@@ -7829,8 +7874,8 @@
         </p:blipFill>
         <p:spPr>
           <a:xfrm>
-            <a:off x="880110" y="3394710"/>
-            <a:ext cx="297180" cy="297180"/>
+            <a:off x="8515350" y="2297430"/>
+            <a:ext cx="388620" cy="388620"/>
           </a:xfrm>
           <a:prstGeom prst="rect">
             <a:avLst/>
@@ -7839,14 +7884,14 @@
       </p:pic>
       <p:sp>
         <p:nvSpPr>
-          <p:cNvPr id="16" name="Risk 3"/>
+          <p:cNvPr id="17" name="Nonprofits header"/>
           <p:cNvSpPr txBox="1"/>
           <p:nvPr/>
         </p:nvSpPr>
         <p:spPr>
           <a:xfrm>
-            <a:off x="1554480" y="3154680"/>
-            <a:ext cx="3383280" cy="777240"/>
+            <a:off x="8321040" y="3017520"/>
+            <a:ext cx="3017520" cy="457200"/>
           </a:xfrm>
           <a:prstGeom prst="rect">
             <a:avLst/>
@@ -7862,27 +7907,26 @@
               <a:buNone/>
             </a:pPr>
             <a:r>
-              <a:rPr lang="en-US" sz="1700" b="1" dirty="0">
+              <a:rPr lang="en-US" sz="2200" b="1">
                 <a:solidFill>
                   <a:schemeClr val="tx1"/>
                 </a:solidFill>
               </a:rPr>
-              <a:t>Rewards get expensive</a:t>
-            </a:r>
-            <a:endParaRPr lang="en-US" sz="1700" dirty="0"/>
-          </a:p>
-        </p:txBody>
-      </p:sp>
-      <p:sp>
-        <p:nvSpPr>
-          <p:cNvPr id="17" name="Answer 3"/>
+              <a:t>Next 6 months</a:t>
+            </a:r>
+          </a:p>
+        </p:txBody>
+      </p:sp>
+      <p:sp>
+        <p:nvSpPr>
+          <p:cNvPr id="18" name="Nonprofits text"/>
           <p:cNvSpPr txBox="1"/>
           <p:nvPr/>
         </p:nvSpPr>
         <p:spPr>
           <a:xfrm>
-            <a:off x="5029200" y="3154680"/>
-            <a:ext cx="6400800" cy="777240"/>
+            <a:off x="8321040" y="3520440"/>
+            <a:ext cx="3017520" cy="1005840"/>
           </a:xfrm>
           <a:prstGeom prst="rect">
             <a:avLst/>
@@ -7891,42 +7935,41 @@
           <a:ln/>
         </p:spPr>
         <p:txBody>
-          <a:bodyPr wrap="square" lIns="0" tIns="0" rIns="0" bIns="0" rtlCol="0" anchor="ctr"/>
+          <a:bodyPr wrap="square" lIns="0" tIns="0" rIns="0" bIns="0" rtlCol="0" anchor="t"/>
           <a:lstStyle/>
           <a:p>
             <a:pPr marL="0" indent="0">
               <a:buNone/>
             </a:pPr>
             <a:r>
-              <a:rPr lang="en-US" sz="1600" dirty="0">
+              <a:rPr lang="en-US" sz="1600">
                 <a:solidFill>
                   <a:schemeClr val="accent5"/>
                 </a:solidFill>
               </a:rPr>
-              <a:t>Rewards are sponsored by local businesses in exchange for visibility</a:t>
-            </a:r>
-            <a:endParaRPr lang="en-US" sz="1600" dirty="0"/>
-          </a:p>
-        </p:txBody>
-      </p:sp>
-      <p:sp>
-        <p:nvSpPr>
-          <p:cNvPr id="18" name="Risk row 4"/>
+              <a:t>5 local sponsors. Measure who comes back. Second town.</a:t>
+            </a:r>
+          </a:p>
+        </p:txBody>
+      </p:sp>
+      <p:sp>
+        <p:nvSpPr>
+          <p:cNvPr id="19" name="Next step strip"/>
           <p:cNvSpPr/>
           <p:nvPr/>
         </p:nvSpPr>
         <p:spPr>
           <a:xfrm>
-            <a:off x="548640" y="4069080"/>
-            <a:ext cx="11064240" cy="777240"/>
+            <a:off x="548640" y="4892040"/>
+            <a:ext cx="11064240" cy="868680"/>
           </a:xfrm>
           <a:prstGeom prst="roundRect">
             <a:avLst>
-              <a:gd name="adj" fmla="val 17647"/>
+              <a:gd name="adj" fmla="val 15789"/>
             </a:avLst>
           </a:prstGeom>
           <a:solidFill>
-            <a:srgbClr val="FFFFFF"/>
+            <a:srgbClr val="14342B"/>
           </a:solidFill>
           <a:ln/>
         </p:spPr>
@@ -7940,65 +7983,14 @@
       </p:sp>
       <p:sp>
         <p:nvSpPr>
-          <p:cNvPr id="19" name="Risk 4 circle"/>
-          <p:cNvSpPr/>
-          <p:nvPr/>
-        </p:nvSpPr>
-        <p:spPr>
-          <a:xfrm>
-            <a:off x="731520" y="4160520"/>
-            <a:ext cx="594360" cy="594360"/>
-          </a:xfrm>
-          <a:prstGeom prst="ellipse">
-            <a:avLst/>
-          </a:prstGeom>
-          <a:solidFill>
-            <a:srgbClr val="F2A33A"/>
-          </a:solidFill>
-          <a:ln/>
-        </p:spPr>
-        <p:txBody>
-          <a:bodyPr/>
-          <a:lstStyle/>
-          <a:p>
-            <a:endParaRPr lang="en-CH"/>
-          </a:p>
-        </p:txBody>
-      </p:sp>
-      <p:pic>
-        <p:nvPicPr>
-          <p:cNvPr id="20" name="Risk 4 icon" descr="Risk 4"/>
-          <p:cNvPicPr>
-            <a:picLocks noChangeAspect="1"/>
-          </p:cNvPicPr>
-          <p:nvPr/>
-        </p:nvPicPr>
-        <p:blipFill>
-          <a:blip r:embed="rId6"/>
-          <a:stretch>
-            <a:fillRect/>
-          </a:stretch>
-        </p:blipFill>
-        <p:spPr>
-          <a:xfrm>
-            <a:off x="880110" y="4309110"/>
-            <a:ext cx="297180" cy="297180"/>
-          </a:xfrm>
-          <a:prstGeom prst="rect">
-            <a:avLst/>
-          </a:prstGeom>
-        </p:spPr>
-      </p:pic>
-      <p:sp>
-        <p:nvSpPr>
-          <p:cNvPr id="21" name="Risk 4"/>
+          <p:cNvPr id="20" name="Next step text"/>
           <p:cNvSpPr txBox="1"/>
           <p:nvPr/>
         </p:nvSpPr>
         <p:spPr>
           <a:xfrm>
-            <a:off x="1554480" y="4069080"/>
-            <a:ext cx="3383280" cy="777240"/>
+            <a:off x="868680" y="4892040"/>
+            <a:ext cx="10515600" cy="868680"/>
           </a:xfrm>
           <a:prstGeom prst="rect">
             <a:avLst/>
@@ -8014,206 +8006,27 @@
               <a:buNone/>
             </a:pPr>
             <a:r>
-              <a:rPr lang="en-US" sz="1700" b="1" dirty="0">
-                <a:solidFill>
-                  <a:schemeClr val="tx1"/>
-                </a:solidFill>
-              </a:rPr>
-              <a:t>The novelty wears off</a:t>
-            </a:r>
-            <a:endParaRPr lang="en-US" sz="1700" dirty="0"/>
-          </a:p>
-        </p:txBody>
-      </p:sp>
-      <p:sp>
-        <p:nvSpPr>
-          <p:cNvPr id="22" name="Answer 4"/>
-          <p:cNvSpPr txBox="1"/>
-          <p:nvPr/>
-        </p:nvSpPr>
-        <p:spPr>
-          <a:xfrm>
-            <a:off x="5029200" y="4069080"/>
-            <a:ext cx="6400800" cy="777240"/>
-          </a:xfrm>
-          <a:prstGeom prst="rect">
-            <a:avLst/>
-          </a:prstGeom>
-          <a:noFill/>
-          <a:ln/>
-        </p:spPr>
-        <p:txBody>
-          <a:bodyPr wrap="square" lIns="0" tIns="0" rIns="0" bIns="0" rtlCol="0" anchor="ctr"/>
-          <a:lstStyle/>
-          <a:p>
-            <a:pPr marL="0" indent="0">
-              <a:buNone/>
-            </a:pPr>
-            <a:r>
-              <a:rPr lang="en-US" sz="1600">
-                <a:solidFill>
-                  <a:schemeClr val="accent5"/>
-                </a:solidFill>
-              </a:rPr>
-              <a:t>Seasonal and team challenges plus local events keep it fresh</a:t>
-            </a:r>
-          </a:p>
-        </p:txBody>
-      </p:sp>
-      <p:sp>
-        <p:nvSpPr>
-          <p:cNvPr id="23" name="Risk row 5"/>
-          <p:cNvSpPr/>
-          <p:nvPr/>
-        </p:nvSpPr>
-        <p:spPr>
-          <a:xfrm>
-            <a:off x="548640" y="4983480"/>
-            <a:ext cx="11064240" cy="777240"/>
-          </a:xfrm>
-          <a:prstGeom prst="roundRect">
-            <a:avLst>
-              <a:gd name="adj" fmla="val 17647"/>
-            </a:avLst>
-          </a:prstGeom>
-          <a:solidFill>
-            <a:srgbClr val="EEF4EE"/>
-          </a:solidFill>
-          <a:ln/>
-        </p:spPr>
-        <p:txBody>
-          <a:bodyPr/>
-          <a:lstStyle/>
-          <a:p>
-            <a:endParaRPr lang="en-CH"/>
-          </a:p>
-        </p:txBody>
-      </p:sp>
-      <p:sp>
-        <p:nvSpPr>
-          <p:cNvPr id="24" name="Risk 5 circle"/>
-          <p:cNvSpPr/>
-          <p:nvPr/>
-        </p:nvSpPr>
-        <p:spPr>
-          <a:xfrm>
-            <a:off x="731520" y="5074920"/>
-            <a:ext cx="594360" cy="594360"/>
-          </a:xfrm>
-          <a:prstGeom prst="ellipse">
-            <a:avLst/>
-          </a:prstGeom>
-          <a:solidFill>
-            <a:srgbClr val="F2A33A"/>
-          </a:solidFill>
-          <a:ln/>
-        </p:spPr>
-        <p:txBody>
-          <a:bodyPr/>
-          <a:lstStyle/>
-          <a:p>
-            <a:endParaRPr lang="en-CH"/>
-          </a:p>
-        </p:txBody>
-      </p:sp>
-      <p:pic>
-        <p:nvPicPr>
-          <p:cNvPr id="25" name="Risk 5 icon" descr="Risk 5"/>
-          <p:cNvPicPr>
-            <a:picLocks noChangeAspect="1"/>
-          </p:cNvPicPr>
-          <p:nvPr/>
-        </p:nvPicPr>
-        <p:blipFill>
-          <a:blip r:embed="rId7"/>
-          <a:stretch>
-            <a:fillRect/>
-          </a:stretch>
-        </p:blipFill>
-        <p:spPr>
-          <a:xfrm>
-            <a:off x="880110" y="5223510"/>
-            <a:ext cx="297180" cy="297180"/>
-          </a:xfrm>
-          <a:prstGeom prst="rect">
-            <a:avLst/>
-          </a:prstGeom>
-        </p:spPr>
-      </p:pic>
-      <p:sp>
-        <p:nvSpPr>
-          <p:cNvPr id="26" name="Risk 5"/>
-          <p:cNvSpPr txBox="1"/>
-          <p:nvPr/>
-        </p:nvSpPr>
-        <p:spPr>
-          <a:xfrm>
-            <a:off x="1554480" y="4983480"/>
-            <a:ext cx="3383280" cy="777240"/>
-          </a:xfrm>
-          <a:prstGeom prst="rect">
-            <a:avLst/>
-          </a:prstGeom>
-          <a:noFill/>
-          <a:ln/>
-        </p:spPr>
-        <p:txBody>
-          <a:bodyPr wrap="square" lIns="0" tIns="0" rIns="0" bIns="0" rtlCol="0" anchor="ctr"/>
-          <a:lstStyle/>
-          <a:p>
-            <a:pPr marL="0" indent="0">
-              <a:buNone/>
-            </a:pPr>
-            <a:r>
-              <a:rPr lang="en-US" sz="1700" b="1" dirty="0">
-                <a:solidFill>
-                  <a:schemeClr val="tx1"/>
-                </a:solidFill>
-              </a:rPr>
-              <a:t>Privacy</a:t>
-            </a:r>
-            <a:endParaRPr lang="en-US" sz="1700" dirty="0"/>
-          </a:p>
-        </p:txBody>
-      </p:sp>
-      <p:sp>
-        <p:nvSpPr>
-          <p:cNvPr id="27" name="Answer 5"/>
-          <p:cNvSpPr txBox="1"/>
-          <p:nvPr/>
-        </p:nvSpPr>
-        <p:spPr>
-          <a:xfrm>
-            <a:off x="5029200" y="4983480"/>
-            <a:ext cx="6400800" cy="777240"/>
-          </a:xfrm>
-          <a:prstGeom prst="rect">
-            <a:avLst/>
-          </a:prstGeom>
-          <a:noFill/>
-          <a:ln/>
-        </p:spPr>
-        <p:txBody>
-          <a:bodyPr wrap="square" lIns="0" tIns="0" rIns="0" bIns="0" rtlCol="0" anchor="ctr"/>
-          <a:lstStyle/>
-          <a:p>
-            <a:pPr marL="0" indent="0">
-              <a:buNone/>
-            </a:pPr>
-            <a:r>
-              <a:rPr lang="en-US" sz="1600">
-                <a:solidFill>
-                  <a:schemeClr val="accent5"/>
-                </a:solidFill>
-              </a:rPr>
-              <a:t>No ads, no selling data; partners only see anonymised totals (Swiss nFADP)</a:t>
-            </a:r>
-          </a:p>
-        </p:txBody>
-      </p:sp>
-      <p:sp>
-        <p:nvSpPr>
-          <p:cNvPr id="28" name="Slide Number Placeholder 0"/>
+              <a:rPr lang="en-US" sz="2000" b="1" dirty="0">
+                <a:solidFill>
+                  <a:schemeClr val="accent1"/>
+                </a:solidFill>
+              </a:rPr>
+              <a:t>We need: </a:t>
+            </a:r>
+            <a:r>
+              <a:rPr lang="en-US" sz="2000" dirty="0">
+                <a:solidFill>
+                  <a:schemeClr val="bg1"/>
+                </a:solidFill>
+              </a:rPr>
+              <a:t>a pilot town, local reward sponsors, and your feedback to improve on!</a:t>
+            </a:r>
+          </a:p>
+        </p:txBody>
+      </p:sp>
+      <p:sp>
+        <p:nvSpPr>
+          <p:cNvPr id="25" name="Slide Number Placeholder 0"/>
           <p:cNvSpPr>
             <a:spLocks noGrp="1"/>
           </p:cNvSpPr>
@@ -8231,7 +8044,7 @@
           </a:prstGeom>
           <a:extLst>
             <a:ext uri="{C572A759-6A51-4108-AA02-DFA0A04FC94B}">
-              <ma14:wrappingTextBoxFlag xmlns:ma14="http://schemas.microsoft.com/office/mac/drawingml/2011/main" xmlns="" val="0"/>
+              <ma14:wrappingTextBoxFlag xmlns="" xmlns:ma14="http://schemas.microsoft.com/office/mac/drawingml/2011/main" val="0"/>
             </a:ext>
           </a:extLst>
         </p:spPr>
@@ -8264,7 +8077,7 @@
 </p:sld>
 </file>
 
-<file path=ppt/slides/slide9.xml><?xml version="1.0" encoding="utf-8"?>
+<file path=ppt/slides/slide8.xml><?xml version="1.0" encoding="utf-8"?>
 <p:sld xmlns:a="http://schemas.openxmlformats.org/drawingml/2006/main" xmlns:r="http://schemas.openxmlformats.org/officeDocument/2006/relationships" xmlns:p="http://schemas.openxmlformats.org/presentationml/2006/main">
   <p:cSld>
     <p:spTree>
@@ -8329,14 +8142,11 @@
                 <a:spcPts val="1000"/>
               </a:spcAft>
             </a:pPr>
-            <a:r>
-              <a:rPr lang="en-CH" sz="1200">
-                <a:solidFill>
-                  <a:schemeClr val="bg1"/>
-                </a:solidFill>
-              </a:rPr>
-              <a:t/>
-            </a:r>
+            <a:endParaRPr lang="en-CH" sz="1600" b="1">
+              <a:solidFill>
+                <a:schemeClr val="accent1"/>
+              </a:solidFill>
+            </a:endParaRPr>
           </a:p>
           <a:p>
             <a:pPr>
@@ -8358,7 +8168,7 @@
                   <a:schemeClr val="bg1"/>
                 </a:solidFill>
               </a:rPr>
-              <a:t xml:space="preserve">  App developer &amp; team lead</a:t>
+              <a:t>  App developer &amp; team lead</a:t>
             </a:r>
           </a:p>
           <a:p>
@@ -8381,7 +8191,7 @@
                   <a:schemeClr val="bg1"/>
                 </a:solidFill>
               </a:rPr>
-              <a:t xml:space="preserve">  App design &amp; slides</a:t>
+              <a:t>  App design &amp; slides</a:t>
             </a:r>
           </a:p>
           <a:p>
@@ -8404,7 +8214,7 @@
                   <a:schemeClr val="bg1"/>
                 </a:solidFill>
               </a:rPr>
-              <a:t xml:space="preserve">  Research &amp; all-round help</a:t>
+              <a:t>  Research &amp; all-round help</a:t>
             </a:r>
           </a:p>
           <a:p>
@@ -8413,14 +8223,11 @@
                 <a:spcPts val="1000"/>
               </a:spcAft>
             </a:pPr>
-            <a:r>
-              <a:rPr lang="en-CH" sz="1200">
-                <a:solidFill>
-                  <a:schemeClr val="bg1"/>
-                </a:solidFill>
-              </a:rPr>
-              <a:t/>
-            </a:r>
+            <a:endParaRPr lang="en-CH" sz="2400">
+              <a:solidFill>
+                <a:schemeClr val="bg1"/>
+              </a:solidFill>
+            </a:endParaRPr>
           </a:p>
           <a:p>
             <a:pPr>
@@ -8434,7 +8241,7 @@
                   <a:schemeClr val="accent1"/>
                 </a:solidFill>
               </a:rPr>
-              <a:t xml:space="preserve">Use of AI: </a:t>
+              <a:t>Use of AI: </a:t>
             </a:r>
             <a:r>
               <a:rPr lang="en-CH" sz="1800">
@@ -8453,6 +8260,299 @@
         <p14:creationId xmlns:p14="http://schemas.microsoft.com/office/powerpoint/2010/main" val="3621072242"/>
       </p:ext>
     </p:extLst>
+  </p:cSld>
+  <p:clrMapOvr>
+    <a:masterClrMapping/>
+  </p:clrMapOvr>
+</p:sld>
+</file>
+
+<file path=ppt/slides/slide9.xml><?xml version="1.0" encoding="utf-8"?>
+<p:sld xmlns:a="http://schemas.openxmlformats.org/drawingml/2006/main" xmlns:r="http://schemas.openxmlformats.org/officeDocument/2006/relationships" xmlns:p="http://schemas.openxmlformats.org/presentationml/2006/main">
+  <p:cSld name="Slide 9">
+    <p:spTree>
+      <p:nvGrpSpPr>
+        <p:cNvPr id="1" name=""/>
+        <p:cNvGrpSpPr/>
+        <p:nvPr/>
+      </p:nvGrpSpPr>
+      <p:grpSpPr>
+        <a:xfrm>
+          <a:off x="0" y="0"/>
+          <a:ext cx="0" cy="0"/>
+          <a:chOff x="0" y="0"/>
+          <a:chExt cx="0" cy="0"/>
+        </a:xfrm>
+      </p:grpSpPr>
+      <p:sp>
+        <p:nvSpPr>
+          <p:cNvPr id="2" name="Eyebrow"/>
+          <p:cNvSpPr txBox="1"/>
+          <p:nvPr/>
+        </p:nvSpPr>
+        <p:spPr>
+          <a:xfrm>
+            <a:off x="731520" y="1600200"/>
+            <a:ext cx="7132320" cy="365760"/>
+          </a:xfrm>
+          <a:prstGeom prst="rect">
+            <a:avLst/>
+          </a:prstGeom>
+          <a:noFill/>
+          <a:ln/>
+        </p:spPr>
+        <p:txBody>
+          <a:bodyPr wrap="square" lIns="0" tIns="0" rIns="0" bIns="0" rtlCol="0" anchor="ctr"/>
+          <a:lstStyle/>
+          <a:p>
+            <a:pPr marL="0" indent="0">
+              <a:buNone/>
+            </a:pPr>
+            <a:r>
+              <a:rPr lang="en-US" sz="1600" b="1" kern="0" spc="400" dirty="0">
+                <a:solidFill>
+                  <a:schemeClr val="accent1"/>
+                </a:solidFill>
+              </a:rPr>
+              <a:t>OUR VISION</a:t>
+            </a:r>
+            <a:endParaRPr lang="en-US" sz="1600" dirty="0"/>
+          </a:p>
+        </p:txBody>
+      </p:sp>
+      <p:sp>
+        <p:nvSpPr>
+          <p:cNvPr id="3" name="Vision"/>
+          <p:cNvSpPr txBox="1"/>
+          <p:nvPr/>
+        </p:nvSpPr>
+        <p:spPr>
+          <a:xfrm>
+            <a:off x="731520" y="2057400"/>
+            <a:ext cx="7132320" cy="1325880"/>
+          </a:xfrm>
+          <a:prstGeom prst="rect">
+            <a:avLst/>
+          </a:prstGeom>
+          <a:noFill/>
+          <a:ln/>
+        </p:spPr>
+        <p:txBody>
+          <a:bodyPr wrap="square" lIns="0" tIns="0" rIns="0" bIns="0" rtlCol="0" anchor="t"/>
+          <a:lstStyle/>
+          <a:p>
+            <a:pPr marL="0" indent="0">
+              <a:buNone/>
+            </a:pPr>
+            <a:r>
+              <a:rPr lang="en-US" sz="3600" b="1" dirty="0">
+                <a:solidFill>
+                  <a:schemeClr val="bg1"/>
+                </a:solidFill>
+              </a:rPr>
+              <a:t>Make sustainability rewarding. Make recycling a habit.</a:t>
+            </a:r>
+            <a:endParaRPr lang="en-US" sz="3600" dirty="0"/>
+          </a:p>
+        </p:txBody>
+      </p:sp>
+      <p:sp>
+        <p:nvSpPr>
+          <p:cNvPr id="4" name="Motto"/>
+          <p:cNvSpPr txBox="1"/>
+          <p:nvPr/>
+        </p:nvSpPr>
+        <p:spPr>
+          <a:xfrm>
+            <a:off x="731520" y="3611880"/>
+            <a:ext cx="7132320" cy="822960"/>
+          </a:xfrm>
+          <a:prstGeom prst="rect">
+            <a:avLst/>
+          </a:prstGeom>
+          <a:noFill/>
+          <a:ln/>
+        </p:spPr>
+        <p:txBody>
+          <a:bodyPr wrap="square" lIns="0" tIns="0" rIns="0" bIns="0" rtlCol="0" anchor="t"/>
+          <a:lstStyle/>
+          <a:p>
+            <a:pPr marL="0" indent="0">
+              <a:buNone/>
+            </a:pPr>
+            <a:r>
+              <a:rPr lang="en-US" sz="2400" b="1" dirty="0">
+                <a:solidFill>
+                  <a:schemeClr val="accent1"/>
+                </a:solidFill>
+              </a:rPr>
+              <a:t>One action. One reward. A better community. A better future!</a:t>
+            </a:r>
+            <a:endParaRPr lang="en-US" sz="2400" dirty="0"/>
+          </a:p>
+        </p:txBody>
+      </p:sp>
+      <p:sp>
+        <p:nvSpPr>
+          <p:cNvPr id="5" name="Thanks"/>
+          <p:cNvSpPr txBox="1"/>
+          <p:nvPr/>
+        </p:nvSpPr>
+        <p:spPr>
+          <a:xfrm>
+            <a:off x="731520" y="4803188"/>
+            <a:ext cx="7132320" cy="457200"/>
+          </a:xfrm>
+          <a:prstGeom prst="rect">
+            <a:avLst/>
+          </a:prstGeom>
+          <a:noFill/>
+          <a:ln/>
+        </p:spPr>
+        <p:txBody>
+          <a:bodyPr wrap="square" lIns="0" tIns="0" rIns="0" bIns="0" rtlCol="0" anchor="ctr"/>
+          <a:lstStyle/>
+          <a:p>
+            <a:pPr marL="0" indent="0">
+              <a:buNone/>
+            </a:pPr>
+            <a:r>
+              <a:rPr lang="en-US" sz="2200" dirty="0">
+                <a:solidFill>
+                  <a:schemeClr val="accent4"/>
+                </a:solidFill>
+              </a:rPr>
+              <a:t>Help us start in </a:t>
+            </a:r>
+            <a:r>
+              <a:rPr lang="en-US" sz="2200" dirty="0" err="1">
+                <a:solidFill>
+                  <a:schemeClr val="accent4"/>
+                </a:solidFill>
+              </a:rPr>
+              <a:t>Rotkreuz</a:t>
+            </a:r>
+            <a:r>
+              <a:rPr lang="en-US" sz="2200" dirty="0">
+                <a:solidFill>
+                  <a:schemeClr val="accent4"/>
+                </a:solidFill>
+              </a:rPr>
+              <a:t>. One step at a time!</a:t>
+            </a:r>
+          </a:p>
+          <a:p>
+            <a:pPr marL="0" indent="0">
+              <a:buNone/>
+            </a:pPr>
+            <a:r>
+              <a:rPr lang="en-US" sz="2200" dirty="0">
+                <a:solidFill>
+                  <a:schemeClr val="accent4"/>
+                </a:solidFill>
+              </a:rPr>
+              <a:t> Thank you!</a:t>
+            </a:r>
+          </a:p>
+        </p:txBody>
+      </p:sp>
+      <p:sp>
+        <p:nvSpPr>
+          <p:cNvPr id="6" name="Badge circle"/>
+          <p:cNvSpPr/>
+          <p:nvPr/>
+        </p:nvSpPr>
+        <p:spPr>
+          <a:xfrm>
+            <a:off x="8138160" y="1691640"/>
+            <a:ext cx="3291840" cy="3291840"/>
+          </a:xfrm>
+          <a:prstGeom prst="ellipse">
+            <a:avLst/>
+          </a:prstGeom>
+          <a:solidFill>
+            <a:schemeClr val="accent1"/>
+          </a:solidFill>
+          <a:ln/>
+        </p:spPr>
+        <p:txBody>
+          <a:bodyPr/>
+          <a:lstStyle/>
+          <a:p>
+            <a:endParaRPr lang="en-CH"/>
+          </a:p>
+        </p:txBody>
+      </p:sp>
+      <p:pic>
+        <p:nvPicPr>
+          <p:cNvPr id="7" name="Leaf icon" descr="Leaf"/>
+          <p:cNvPicPr>
+            <a:picLocks noChangeAspect="1"/>
+          </p:cNvPicPr>
+          <p:nvPr/>
+        </p:nvPicPr>
+        <p:blipFill>
+          <a:blip r:embed="rId3"/>
+          <a:stretch>
+            <a:fillRect/>
+          </a:stretch>
+        </p:blipFill>
+        <p:spPr>
+          <a:xfrm>
+            <a:off x="8869680" y="2423160"/>
+            <a:ext cx="1828800" cy="1828800"/>
+          </a:xfrm>
+          <a:prstGeom prst="rect">
+            <a:avLst/>
+          </a:prstGeom>
+        </p:spPr>
+      </p:pic>
+      <p:sp>
+        <p:nvSpPr>
+          <p:cNvPr id="25" name="Slide Number Placeholder 0"/>
+          <p:cNvSpPr>
+            <a:spLocks noGrp="1"/>
+          </p:cNvSpPr>
+          <p:nvPr>
+            <p:ph type="sldNum" sz="quarter" idx="4294967295"/>
+          </p:nvPr>
+        </p:nvSpPr>
+        <p:spPr>
+          <a:xfrm>
+            <a:off x="11155680" y="6400800"/>
+            <a:ext cx="457200" cy="274320"/>
+          </a:xfrm>
+          <a:prstGeom prst="rect">
+            <a:avLst/>
+          </a:prstGeom>
+          <a:extLst>
+            <a:ext uri="{C572A759-6A51-4108-AA02-DFA0A04FC94B}">
+              <ma14:wrappingTextBoxFlag xmlns="" xmlns:ma14="http://schemas.microsoft.com/office/mac/drawingml/2011/main" val="0"/>
+            </a:ext>
+          </a:extLst>
+        </p:spPr>
+        <p:txBody>
+          <a:bodyPr/>
+          <a:lstStyle>
+            <a:lvl1pPr>
+              <a:defRPr sz="1000">
+                <a:solidFill>
+                  <a:schemeClr val="accent4"/>
+                </a:solidFill>
+              </a:defRPr>
+            </a:lvl1pPr>
+          </a:lstStyle>
+          <a:p>
+            <a:pPr algn="r"/>
+            <a:fld id="{F7021451-1387-4CA6-816F-3879F97B5CBC}" type="slidenum">
+              <a:rPr lang="en-US" b="0"/>
+              <a:t>9</a:t>
+            </a:fld>
+            <a:endParaRPr lang="en-US"/>
+          </a:p>
+        </p:txBody>
+      </p:sp>
+    </p:spTree>
   </p:cSld>
   <p:clrMapOvr>
     <a:masterClrMapping/>
